--- a/analytics/static/analytics/docs/ChaiIntel-Presentation.pptx
+++ b/analytics/static/analytics/docs/ChaiIntel-Presentation.pptx
@@ -29,7 +29,6 @@
     <p:sldId id="277" r:id="rId28"/>
     <p:sldId id="278" r:id="rId29"/>
     <p:sldId id="279" r:id="rId30"/>
-    <p:sldId id="280" r:id="rId31"/>
   </p:sldIdLst>
   <p:sldSz cx="12191695" cy="6858000" type="screen4x3"/>
   <p:notesSz cx="6858000" cy="9144000"/>
@@ -5201,7 +5200,7 @@
               </a:defRPr>
             </a:pPr>
             <a:r>
-              <a:t>Selection — chosen model: Random Forest</a:t>
+              <a:t>Selection — chosen model: Linear Regression</a:t>
             </a:r>
           </a:p>
         </p:txBody>
@@ -5298,7 +5297,7 @@
               </a:defRPr>
             </a:pPr>
             <a:r>
-              <a:t>Chosen: Random Forest</a:t>
+              <a:t>Chosen: Linear Regression</a:t>
             </a:r>
           </a:p>
           <a:p>
@@ -5328,7 +5327,7 @@
               </a:defRPr>
             </a:pPr>
             <a:r>
-              <a:t>Mean MAPE: 7.80%</a:t>
+              <a:t>Mean MAPE: 9.45%</a:t>
             </a:r>
           </a:p>
           <a:p>
@@ -5343,7 +5342,7 @@
               </a:defRPr>
             </a:pPr>
             <a:r>
-              <a:t>Mean RMSE: 18.43</a:t>
+              <a:t>Mean RMSE: 17.52</a:t>
             </a:r>
           </a:p>
           <a:p>
@@ -5650,7 +5649,7 @@
                             <a:srgbClr val="141C1A"/>
                           </a:solidFill>
                         </a:rPr>
-                        <a:t>Random Forest</a:t>
+                        <a:t>Linear Regression</a:t>
                       </a:r>
                     </a:p>
                   </a:txBody>
@@ -5692,7 +5691,7 @@
                             <a:srgbClr val="141C1A"/>
                           </a:solidFill>
                         </a:rPr>
-                        <a:t>7.80%</a:t>
+                        <a:t>9.45%</a:t>
                       </a:r>
                     </a:p>
                   </a:txBody>
@@ -5713,7 +5712,7 @@
                             <a:srgbClr val="141C1A"/>
                           </a:solidFill>
                         </a:rPr>
-                        <a:t>18.43</a:t>
+                        <a:t>17.52</a:t>
                       </a:r>
                     </a:p>
                   </a:txBody>
@@ -5734,7 +5733,7 @@
                             <a:srgbClr val="141C1A"/>
                           </a:solidFill>
                         </a:rPr>
-                        <a:t>15.33</a:t>
+                        <a:t>17.52</a:t>
                       </a:r>
                     </a:p>
                   </a:txBody>
@@ -5757,7 +5756,7 @@
                             <a:srgbClr val="141C1A"/>
                           </a:solidFill>
                         </a:rPr>
-                        <a:t>Linear Regression</a:t>
+                        <a:t>Random Forest</a:t>
                       </a:r>
                     </a:p>
                   </a:txBody>
@@ -5791,41 +5790,41 @@
                             <a:srgbClr val="141C1A"/>
                           </a:solidFill>
                         </a:rPr>
-                        <a:t>13.51%</a:t>
-                      </a:r>
-                    </a:p>
-                  </a:txBody>
-                  <a:tcPr/>
-                </a:tc>
-                <a:tc>
-                  <a:txBody>
-                    <a:bodyPr/>
-                    <a:lstStyle/>
-                    <a:p>
-                      <a:r>
-                        <a:rPr sz="1100">
-                          <a:solidFill>
-                            <a:srgbClr val="141C1A"/>
-                          </a:solidFill>
-                        </a:rPr>
-                        <a:t>30.98</a:t>
-                      </a:r>
-                    </a:p>
-                  </a:txBody>
-                  <a:tcPr/>
-                </a:tc>
-                <a:tc>
-                  <a:txBody>
-                    <a:bodyPr/>
-                    <a:lstStyle/>
-                    <a:p>
-                      <a:r>
-                        <a:rPr sz="1100">
-                          <a:solidFill>
-                            <a:srgbClr val="141C1A"/>
-                          </a:solidFill>
-                        </a:rPr>
-                        <a:t>25.95</a:t>
+                        <a:t>10.45%</a:t>
+                      </a:r>
+                    </a:p>
+                  </a:txBody>
+                  <a:tcPr/>
+                </a:tc>
+                <a:tc>
+                  <a:txBody>
+                    <a:bodyPr/>
+                    <a:lstStyle/>
+                    <a:p>
+                      <a:r>
+                        <a:rPr sz="1100">
+                          <a:solidFill>
+                            <a:srgbClr val="141C1A"/>
+                          </a:solidFill>
+                        </a:rPr>
+                        <a:t>20.04</a:t>
+                      </a:r>
+                    </a:p>
+                  </a:txBody>
+                  <a:tcPr/>
+                </a:tc>
+                <a:tc>
+                  <a:txBody>
+                    <a:bodyPr/>
+                    <a:lstStyle/>
+                    <a:p>
+                      <a:r>
+                        <a:rPr sz="1100">
+                          <a:solidFill>
+                            <a:srgbClr val="141C1A"/>
+                          </a:solidFill>
+                        </a:rPr>
+                        <a:t>20.04</a:t>
                       </a:r>
                     </a:p>
                   </a:txBody>
@@ -6242,41 +6241,41 @@
                             <a:srgbClr val="141C1A"/>
                           </a:solidFill>
                         </a:rPr>
-                        <a:t>19.56</a:t>
-                      </a:r>
-                    </a:p>
-                  </a:txBody>
-                  <a:tcPr/>
-                </a:tc>
-                <a:tc>
-                  <a:txBody>
-                    <a:bodyPr/>
-                    <a:lstStyle/>
-                    <a:p>
-                      <a:r>
-                        <a:rPr sz="1100">
-                          <a:solidFill>
-                            <a:srgbClr val="141C1A"/>
-                          </a:solidFill>
-                        </a:rPr>
-                        <a:t>25.48</a:t>
-                      </a:r>
-                    </a:p>
-                  </a:txBody>
-                  <a:tcPr/>
-                </a:tc>
-                <a:tc>
-                  <a:txBody>
-                    <a:bodyPr/>
-                    <a:lstStyle/>
-                    <a:p>
-                      <a:r>
-                        <a:rPr sz="1100">
-                          <a:solidFill>
-                            <a:srgbClr val="141C1A"/>
-                          </a:solidFill>
-                        </a:rPr>
-                        <a:t>9.07%</a:t>
+                        <a:t>42.83</a:t>
+                      </a:r>
+                    </a:p>
+                  </a:txBody>
+                  <a:tcPr/>
+                </a:tc>
+                <a:tc>
+                  <a:txBody>
+                    <a:bodyPr/>
+                    <a:lstStyle/>
+                    <a:p>
+                      <a:r>
+                        <a:rPr sz="1100">
+                          <a:solidFill>
+                            <a:srgbClr val="141C1A"/>
+                          </a:solidFill>
+                        </a:rPr>
+                        <a:t>48.46</a:t>
+                      </a:r>
+                    </a:p>
+                  </a:txBody>
+                  <a:tcPr/>
+                </a:tc>
+                <a:tc>
+                  <a:txBody>
+                    <a:bodyPr/>
+                    <a:lstStyle/>
+                    <a:p>
+                      <a:r>
+                        <a:rPr sz="1100">
+                          <a:solidFill>
+                            <a:srgbClr val="141C1A"/>
+                          </a:solidFill>
+                        </a:rPr>
+                        <a:t>19.11%</a:t>
                       </a:r>
                     </a:p>
                   </a:txBody>
@@ -6354,68 +6353,77 @@
                             <a:srgbClr val="141C1A"/>
                           </a:solidFill>
                         </a:rPr>
-                        <a:t>30.51</a:t>
-                      </a:r>
-                    </a:p>
-                  </a:txBody>
-                  <a:tcPr/>
-                </a:tc>
-                <a:tc>
-                  <a:txBody>
-                    <a:bodyPr/>
-                    <a:lstStyle/>
-                    <a:p>
-                      <a:r>
-                        <a:rPr sz="1100">
-                          <a:solidFill>
-                            <a:srgbClr val="141C1A"/>
-                          </a:solidFill>
-                        </a:rPr>
-                        <a:t>40.35</a:t>
-                      </a:r>
-                    </a:p>
-                  </a:txBody>
-                  <a:tcPr/>
-                </a:tc>
-                <a:tc>
-                  <a:txBody>
-                    <a:bodyPr/>
-                    <a:lstStyle/>
-                    <a:p>
-                      <a:r>
-                        <a:rPr sz="1100">
-                          <a:solidFill>
-                            <a:srgbClr val="141C1A"/>
-                          </a:solidFill>
-                        </a:rPr>
-                        <a:t>13.39%</a:t>
-                      </a:r>
-                    </a:p>
-                  </a:txBody>
-                  <a:tcPr/>
-                </a:tc>
-                <a:tc>
-                  <a:txBody>
-                    <a:bodyPr/>
-                    <a:lstStyle/>
-                    <a:p>
-                      <a:r>
-                        <a:rPr sz="1100">
-                          <a:solidFill>
-                            <a:srgbClr val="141C1A"/>
-                          </a:solidFill>
-                        </a:rPr>
-                        <a:t>-11.180</a:t>
-                      </a:r>
-                    </a:p>
-                  </a:txBody>
-                  <a:tcPr/>
-                </a:tc>
-                <a:tc>
-                  <a:txBody>
-                    <a:bodyPr/>
-                    <a:lstStyle/>
-                    <a:p/>
+                        <a:t>30.18</a:t>
+                      </a:r>
+                    </a:p>
+                  </a:txBody>
+                  <a:tcPr/>
+                </a:tc>
+                <a:tc>
+                  <a:txBody>
+                    <a:bodyPr/>
+                    <a:lstStyle/>
+                    <a:p>
+                      <a:r>
+                        <a:rPr sz="1100">
+                          <a:solidFill>
+                            <a:srgbClr val="141C1A"/>
+                          </a:solidFill>
+                        </a:rPr>
+                        <a:t>30.18</a:t>
+                      </a:r>
+                    </a:p>
+                  </a:txBody>
+                  <a:tcPr/>
+                </a:tc>
+                <a:tc>
+                  <a:txBody>
+                    <a:bodyPr/>
+                    <a:lstStyle/>
+                    <a:p>
+                      <a:r>
+                        <a:rPr sz="1100">
+                          <a:solidFill>
+                            <a:srgbClr val="141C1A"/>
+                          </a:solidFill>
+                        </a:rPr>
+                        <a:t>16.95%</a:t>
+                      </a:r>
+                    </a:p>
+                  </a:txBody>
+                  <a:tcPr/>
+                </a:tc>
+                <a:tc>
+                  <a:txBody>
+                    <a:bodyPr/>
+                    <a:lstStyle/>
+                    <a:p>
+                      <a:r>
+                        <a:rPr sz="1100">
+                          <a:solidFill>
+                            <a:srgbClr val="141C1A"/>
+                          </a:solidFill>
+                        </a:rPr>
+                        <a:t>—</a:t>
+                      </a:r>
+                    </a:p>
+                  </a:txBody>
+                  <a:tcPr/>
+                </a:tc>
+                <a:tc>
+                  <a:txBody>
+                    <a:bodyPr/>
+                    <a:lstStyle/>
+                    <a:p>
+                      <a:r>
+                        <a:rPr sz="1100">
+                          <a:solidFill>
+                            <a:srgbClr val="141C1A"/>
+                          </a:solidFill>
+                        </a:rPr>
+                        <a:t>✓</a:t>
+                      </a:r>
+                    </a:p>
                   </a:txBody>
                   <a:tcPr/>
                 </a:tc>
@@ -6466,77 +6474,68 @@
                             <a:srgbClr val="141C1A"/>
                           </a:solidFill>
                         </a:rPr>
-                        <a:t>18.72</a:t>
-                      </a:r>
-                    </a:p>
-                  </a:txBody>
-                  <a:tcPr/>
-                </a:tc>
-                <a:tc>
-                  <a:txBody>
-                    <a:bodyPr/>
-                    <a:lstStyle/>
-                    <a:p>
-                      <a:r>
-                        <a:rPr sz="1100">
-                          <a:solidFill>
-                            <a:srgbClr val="141C1A"/>
-                          </a:solidFill>
-                        </a:rPr>
-                        <a:t>22.92</a:t>
-                      </a:r>
-                    </a:p>
-                  </a:txBody>
-                  <a:tcPr/>
-                </a:tc>
-                <a:tc>
-                  <a:txBody>
-                    <a:bodyPr/>
-                    <a:lstStyle/>
-                    <a:p>
-                      <a:r>
-                        <a:rPr sz="1100">
-                          <a:solidFill>
-                            <a:srgbClr val="141C1A"/>
-                          </a:solidFill>
-                        </a:rPr>
-                        <a:t>8.67%</a:t>
-                      </a:r>
-                    </a:p>
-                  </a:txBody>
-                  <a:tcPr/>
-                </a:tc>
-                <a:tc>
-                  <a:txBody>
-                    <a:bodyPr/>
-                    <a:lstStyle/>
-                    <a:p>
-                      <a:r>
-                        <a:rPr sz="1100">
-                          <a:solidFill>
-                            <a:srgbClr val="141C1A"/>
-                          </a:solidFill>
-                        </a:rPr>
-                        <a:t>-0.899</a:t>
-                      </a:r>
-                    </a:p>
-                  </a:txBody>
-                  <a:tcPr/>
-                </a:tc>
-                <a:tc>
-                  <a:txBody>
-                    <a:bodyPr/>
-                    <a:lstStyle/>
-                    <a:p>
-                      <a:r>
-                        <a:rPr sz="1100">
-                          <a:solidFill>
-                            <a:srgbClr val="141C1A"/>
-                          </a:solidFill>
-                        </a:rPr>
-                        <a:t>✓</a:t>
-                      </a:r>
-                    </a:p>
+                        <a:t>35.23</a:t>
+                      </a:r>
+                    </a:p>
+                  </a:txBody>
+                  <a:tcPr/>
+                </a:tc>
+                <a:tc>
+                  <a:txBody>
+                    <a:bodyPr/>
+                    <a:lstStyle/>
+                    <a:p>
+                      <a:r>
+                        <a:rPr sz="1100">
+                          <a:solidFill>
+                            <a:srgbClr val="141C1A"/>
+                          </a:solidFill>
+                        </a:rPr>
+                        <a:t>35.23</a:t>
+                      </a:r>
+                    </a:p>
+                  </a:txBody>
+                  <a:tcPr/>
+                </a:tc>
+                <a:tc>
+                  <a:txBody>
+                    <a:bodyPr/>
+                    <a:lstStyle/>
+                    <a:p>
+                      <a:r>
+                        <a:rPr sz="1100">
+                          <a:solidFill>
+                            <a:srgbClr val="141C1A"/>
+                          </a:solidFill>
+                        </a:rPr>
+                        <a:t>19.31%</a:t>
+                      </a:r>
+                    </a:p>
+                  </a:txBody>
+                  <a:tcPr/>
+                </a:tc>
+                <a:tc>
+                  <a:txBody>
+                    <a:bodyPr/>
+                    <a:lstStyle/>
+                    <a:p>
+                      <a:r>
+                        <a:rPr sz="1100">
+                          <a:solidFill>
+                            <a:srgbClr val="141C1A"/>
+                          </a:solidFill>
+                        </a:rPr>
+                        <a:t>—</a:t>
+                      </a:r>
+                    </a:p>
+                  </a:txBody>
+                  <a:tcPr/>
+                </a:tc>
+                <a:tc>
+                  <a:txBody>
+                    <a:bodyPr/>
+                    <a:lstStyle/>
+                    <a:p/>
                   </a:txBody>
                   <a:tcPr/>
                 </a:tc>
@@ -6587,41 +6586,41 @@
                             <a:srgbClr val="141C1A"/>
                           </a:solidFill>
                         </a:rPr>
-                        <a:t>15.58</a:t>
-                      </a:r>
-                    </a:p>
-                  </a:txBody>
-                  <a:tcPr/>
-                </a:tc>
-                <a:tc>
-                  <a:txBody>
-                    <a:bodyPr/>
-                    <a:lstStyle/>
-                    <a:p>
-                      <a:r>
-                        <a:rPr sz="1100">
-                          <a:solidFill>
-                            <a:srgbClr val="141C1A"/>
-                          </a:solidFill>
-                        </a:rPr>
-                        <a:t>19.37</a:t>
-                      </a:r>
-                    </a:p>
-                  </a:txBody>
-                  <a:tcPr/>
-                </a:tc>
-                <a:tc>
-                  <a:txBody>
-                    <a:bodyPr/>
-                    <a:lstStyle/>
-                    <a:p>
-                      <a:r>
-                        <a:rPr sz="1100">
-                          <a:solidFill>
-                            <a:srgbClr val="141C1A"/>
-                          </a:solidFill>
-                        </a:rPr>
-                        <a:t>5.81%</a:t>
+                        <a:t>24.83</a:t>
+                      </a:r>
+                    </a:p>
+                  </a:txBody>
+                  <a:tcPr/>
+                </a:tc>
+                <a:tc>
+                  <a:txBody>
+                    <a:bodyPr/>
+                    <a:lstStyle/>
+                    <a:p>
+                      <a:r>
+                        <a:rPr sz="1100">
+                          <a:solidFill>
+                            <a:srgbClr val="141C1A"/>
+                          </a:solidFill>
+                        </a:rPr>
+                        <a:t>27.94</a:t>
+                      </a:r>
+                    </a:p>
+                  </a:txBody>
+                  <a:tcPr/>
+                </a:tc>
+                <a:tc>
+                  <a:txBody>
+                    <a:bodyPr/>
+                    <a:lstStyle/>
+                    <a:p>
+                      <a:r>
+                        <a:rPr sz="1100">
+                          <a:solidFill>
+                            <a:srgbClr val="141C1A"/>
+                          </a:solidFill>
+                        </a:rPr>
+                        <a:t>9.51%</a:t>
                       </a:r>
                     </a:p>
                   </a:txBody>
@@ -6648,16 +6647,7 @@
                   <a:txBody>
                     <a:bodyPr/>
                     <a:lstStyle/>
-                    <a:p>
-                      <a:r>
-                        <a:rPr sz="1100">
-                          <a:solidFill>
-                            <a:srgbClr val="141C1A"/>
-                          </a:solidFill>
-                        </a:rPr>
-                        <a:t>✓</a:t>
-                      </a:r>
-                    </a:p>
+                    <a:p/>
                   </a:txBody>
                   <a:tcPr/>
                 </a:tc>
@@ -6708,68 +6698,77 @@
                             <a:srgbClr val="141C1A"/>
                           </a:solidFill>
                         </a:rPr>
-                        <a:t>26.28</a:t>
-                      </a:r>
-                    </a:p>
-                  </a:txBody>
-                  <a:tcPr/>
-                </a:tc>
-                <a:tc>
-                  <a:txBody>
-                    <a:bodyPr/>
-                    <a:lstStyle/>
-                    <a:p>
-                      <a:r>
-                        <a:rPr sz="1100">
-                          <a:solidFill>
-                            <a:srgbClr val="141C1A"/>
-                          </a:solidFill>
-                        </a:rPr>
-                        <a:t>29.37</a:t>
-                      </a:r>
-                    </a:p>
-                  </a:txBody>
-                  <a:tcPr/>
-                </a:tc>
-                <a:tc>
-                  <a:txBody>
-                    <a:bodyPr/>
-                    <a:lstStyle/>
-                    <a:p>
-                      <a:r>
-                        <a:rPr sz="1100">
-                          <a:solidFill>
-                            <a:srgbClr val="141C1A"/>
-                          </a:solidFill>
-                        </a:rPr>
-                        <a:t>9.67%</a:t>
-                      </a:r>
-                    </a:p>
-                  </a:txBody>
-                  <a:tcPr/>
-                </a:tc>
-                <a:tc>
-                  <a:txBody>
-                    <a:bodyPr/>
-                    <a:lstStyle/>
-                    <a:p>
-                      <a:r>
-                        <a:rPr sz="1100">
-                          <a:solidFill>
-                            <a:srgbClr val="141C1A"/>
-                          </a:solidFill>
-                        </a:rPr>
-                        <a:t>-24.378</a:t>
-                      </a:r>
-                    </a:p>
-                  </a:txBody>
-                  <a:tcPr/>
-                </a:tc>
-                <a:tc>
-                  <a:txBody>
-                    <a:bodyPr/>
-                    <a:lstStyle/>
-                    <a:p/>
+                        <a:t>19.66</a:t>
+                      </a:r>
+                    </a:p>
+                  </a:txBody>
+                  <a:tcPr/>
+                </a:tc>
+                <a:tc>
+                  <a:txBody>
+                    <a:bodyPr/>
+                    <a:lstStyle/>
+                    <a:p>
+                      <a:r>
+                        <a:rPr sz="1100">
+                          <a:solidFill>
+                            <a:srgbClr val="141C1A"/>
+                          </a:solidFill>
+                        </a:rPr>
+                        <a:t>19.66</a:t>
+                      </a:r>
+                    </a:p>
+                  </a:txBody>
+                  <a:tcPr/>
+                </a:tc>
+                <a:tc>
+                  <a:txBody>
+                    <a:bodyPr/>
+                    <a:lstStyle/>
+                    <a:p>
+                      <a:r>
+                        <a:rPr sz="1100">
+                          <a:solidFill>
+                            <a:srgbClr val="141C1A"/>
+                          </a:solidFill>
+                        </a:rPr>
+                        <a:t>8.32%</a:t>
+                      </a:r>
+                    </a:p>
+                  </a:txBody>
+                  <a:tcPr/>
+                </a:tc>
+                <a:tc>
+                  <a:txBody>
+                    <a:bodyPr/>
+                    <a:lstStyle/>
+                    <a:p>
+                      <a:r>
+                        <a:rPr sz="1100">
+                          <a:solidFill>
+                            <a:srgbClr val="141C1A"/>
+                          </a:solidFill>
+                        </a:rPr>
+                        <a:t>—</a:t>
+                      </a:r>
+                    </a:p>
+                  </a:txBody>
+                  <a:tcPr/>
+                </a:tc>
+                <a:tc>
+                  <a:txBody>
+                    <a:bodyPr/>
+                    <a:lstStyle/>
+                    <a:p>
+                      <a:r>
+                        <a:rPr sz="1100">
+                          <a:solidFill>
+                            <a:srgbClr val="141C1A"/>
+                          </a:solidFill>
+                        </a:rPr>
+                        <a:t>✓</a:t>
+                      </a:r>
+                    </a:p>
                   </a:txBody>
                   <a:tcPr/>
                 </a:tc>
@@ -6820,58 +6819,58 @@
                             <a:srgbClr val="141C1A"/>
                           </a:solidFill>
                         </a:rPr>
-                        <a:t>18.70</a:t>
-                      </a:r>
-                    </a:p>
-                  </a:txBody>
-                  <a:tcPr/>
-                </a:tc>
-                <a:tc>
-                  <a:txBody>
-                    <a:bodyPr/>
-                    <a:lstStyle/>
-                    <a:p>
-                      <a:r>
-                        <a:rPr sz="1100">
-                          <a:solidFill>
-                            <a:srgbClr val="141C1A"/>
-                          </a:solidFill>
-                        </a:rPr>
-                        <a:t>21.84</a:t>
-                      </a:r>
-                    </a:p>
-                  </a:txBody>
-                  <a:tcPr/>
-                </a:tc>
-                <a:tc>
-                  <a:txBody>
-                    <a:bodyPr/>
-                    <a:lstStyle/>
-                    <a:p>
-                      <a:r>
-                        <a:rPr sz="1100">
-                          <a:solidFill>
-                            <a:srgbClr val="141C1A"/>
-                          </a:solidFill>
-                        </a:rPr>
-                        <a:t>6.95%</a:t>
-                      </a:r>
-                    </a:p>
-                  </a:txBody>
-                  <a:tcPr/>
-                </a:tc>
-                <a:tc>
-                  <a:txBody>
-                    <a:bodyPr/>
-                    <a:lstStyle/>
-                    <a:p>
-                      <a:r>
-                        <a:rPr sz="1100">
-                          <a:solidFill>
-                            <a:srgbClr val="141C1A"/>
-                          </a:solidFill>
-                        </a:rPr>
-                        <a:t>-2.797</a:t>
+                        <a:t>21.21</a:t>
+                      </a:r>
+                    </a:p>
+                  </a:txBody>
+                  <a:tcPr/>
+                </a:tc>
+                <a:tc>
+                  <a:txBody>
+                    <a:bodyPr/>
+                    <a:lstStyle/>
+                    <a:p>
+                      <a:r>
+                        <a:rPr sz="1100">
+                          <a:solidFill>
+                            <a:srgbClr val="141C1A"/>
+                          </a:solidFill>
+                        </a:rPr>
+                        <a:t>21.21</a:t>
+                      </a:r>
+                    </a:p>
+                  </a:txBody>
+                  <a:tcPr/>
+                </a:tc>
+                <a:tc>
+                  <a:txBody>
+                    <a:bodyPr/>
+                    <a:lstStyle/>
+                    <a:p>
+                      <a:r>
+                        <a:rPr sz="1100">
+                          <a:solidFill>
+                            <a:srgbClr val="141C1A"/>
+                          </a:solidFill>
+                        </a:rPr>
+                        <a:t>9.05%</a:t>
+                      </a:r>
+                    </a:p>
+                  </a:txBody>
+                  <a:tcPr/>
+                </a:tc>
+                <a:tc>
+                  <a:txBody>
+                    <a:bodyPr/>
+                    <a:lstStyle/>
+                    <a:p>
+                      <a:r>
+                        <a:rPr sz="1100">
+                          <a:solidFill>
+                            <a:srgbClr val="141C1A"/>
+                          </a:solidFill>
+                        </a:rPr>
+                        <a:t>—</a:t>
                       </a:r>
                     </a:p>
                   </a:txBody>
@@ -6932,41 +6931,41 @@
                             <a:srgbClr val="141C1A"/>
                           </a:solidFill>
                         </a:rPr>
-                        <a:t>12.78</a:t>
-                      </a:r>
-                    </a:p>
-                  </a:txBody>
-                  <a:tcPr/>
-                </a:tc>
-                <a:tc>
-                  <a:txBody>
-                    <a:bodyPr/>
-                    <a:lstStyle/>
-                    <a:p>
-                      <a:r>
-                        <a:rPr sz="1100">
-                          <a:solidFill>
-                            <a:srgbClr val="141C1A"/>
-                          </a:solidFill>
-                        </a:rPr>
-                        <a:t>19.58</a:t>
-                      </a:r>
-                    </a:p>
-                  </a:txBody>
-                  <a:tcPr/>
-                </a:tc>
-                <a:tc>
-                  <a:txBody>
-                    <a:bodyPr/>
-                    <a:lstStyle/>
-                    <a:p>
-                      <a:r>
-                        <a:rPr sz="1100">
-                          <a:solidFill>
-                            <a:srgbClr val="141C1A"/>
-                          </a:solidFill>
-                        </a:rPr>
-                        <a:t>5.63%</a:t>
+                        <a:t>19.50</a:t>
+                      </a:r>
+                    </a:p>
+                  </a:txBody>
+                  <a:tcPr/>
+                </a:tc>
+                <a:tc>
+                  <a:txBody>
+                    <a:bodyPr/>
+                    <a:lstStyle/>
+                    <a:p>
+                      <a:r>
+                        <a:rPr sz="1100">
+                          <a:solidFill>
+                            <a:srgbClr val="141C1A"/>
+                          </a:solidFill>
+                        </a:rPr>
+                        <a:t>20.62</a:t>
+                      </a:r>
+                    </a:p>
+                  </a:txBody>
+                  <a:tcPr/>
+                </a:tc>
+                <a:tc>
+                  <a:txBody>
+                    <a:bodyPr/>
+                    <a:lstStyle/>
+                    <a:p>
+                      <a:r>
+                        <a:rPr sz="1100">
+                          <a:solidFill>
+                            <a:srgbClr val="141C1A"/>
+                          </a:solidFill>
+                        </a:rPr>
+                        <a:t>7.49%</a:t>
                       </a:r>
                     </a:p>
                   </a:txBody>
@@ -7053,58 +7052,58 @@
                             <a:srgbClr val="141C1A"/>
                           </a:solidFill>
                         </a:rPr>
-                        <a:t>25.62</a:t>
-                      </a:r>
-                    </a:p>
-                  </a:txBody>
-                  <a:tcPr/>
-                </a:tc>
-                <a:tc>
-                  <a:txBody>
-                    <a:bodyPr/>
-                    <a:lstStyle/>
-                    <a:p>
-                      <a:r>
-                        <a:rPr sz="1100">
-                          <a:solidFill>
-                            <a:srgbClr val="141C1A"/>
-                          </a:solidFill>
-                        </a:rPr>
-                        <a:t>32.91</a:t>
-                      </a:r>
-                    </a:p>
-                  </a:txBody>
-                  <a:tcPr/>
-                </a:tc>
-                <a:tc>
-                  <a:txBody>
-                    <a:bodyPr/>
-                    <a:lstStyle/>
-                    <a:p>
-                      <a:r>
-                        <a:rPr sz="1100">
-                          <a:solidFill>
-                            <a:srgbClr val="141C1A"/>
-                          </a:solidFill>
-                        </a:rPr>
-                        <a:t>10.28%</a:t>
-                      </a:r>
-                    </a:p>
-                  </a:txBody>
-                  <a:tcPr/>
-                </a:tc>
-                <a:tc>
-                  <a:txBody>
-                    <a:bodyPr/>
-                    <a:lstStyle/>
-                    <a:p>
-                      <a:r>
-                        <a:rPr sz="1100">
-                          <a:solidFill>
-                            <a:srgbClr val="141C1A"/>
-                          </a:solidFill>
-                        </a:rPr>
-                        <a:t>-10.188</a:t>
+                        <a:t>19.61</a:t>
+                      </a:r>
+                    </a:p>
+                  </a:txBody>
+                  <a:tcPr/>
+                </a:tc>
+                <a:tc>
+                  <a:txBody>
+                    <a:bodyPr/>
+                    <a:lstStyle/>
+                    <a:p>
+                      <a:r>
+                        <a:rPr sz="1100">
+                          <a:solidFill>
+                            <a:srgbClr val="141C1A"/>
+                          </a:solidFill>
+                        </a:rPr>
+                        <a:t>19.61</a:t>
+                      </a:r>
+                    </a:p>
+                  </a:txBody>
+                  <a:tcPr/>
+                </a:tc>
+                <a:tc>
+                  <a:txBody>
+                    <a:bodyPr/>
+                    <a:lstStyle/>
+                    <a:p>
+                      <a:r>
+                        <a:rPr sz="1100">
+                          <a:solidFill>
+                            <a:srgbClr val="141C1A"/>
+                          </a:solidFill>
+                        </a:rPr>
+                        <a:t>7.81%</a:t>
+                      </a:r>
+                    </a:p>
+                  </a:txBody>
+                  <a:tcPr/>
+                </a:tc>
+                <a:tc>
+                  <a:txBody>
+                    <a:bodyPr/>
+                    <a:lstStyle/>
+                    <a:p>
+                      <a:r>
+                        <a:rPr sz="1100">
+                          <a:solidFill>
+                            <a:srgbClr val="141C1A"/>
+                          </a:solidFill>
+                        </a:rPr>
+                        <a:t>—</a:t>
                       </a:r>
                     </a:p>
                   </a:txBody>
@@ -7165,58 +7164,58 @@
                             <a:srgbClr val="141C1A"/>
                           </a:solidFill>
                         </a:rPr>
-                        <a:t>14.67</a:t>
-                      </a:r>
-                    </a:p>
-                  </a:txBody>
-                  <a:tcPr/>
-                </a:tc>
-                <a:tc>
-                  <a:txBody>
-                    <a:bodyPr/>
-                    <a:lstStyle/>
-                    <a:p>
-                      <a:r>
-                        <a:rPr sz="1100">
-                          <a:solidFill>
-                            <a:srgbClr val="141C1A"/>
-                          </a:solidFill>
-                        </a:rPr>
-                        <a:t>20.43</a:t>
-                      </a:r>
-                    </a:p>
-                  </a:txBody>
-                  <a:tcPr/>
-                </a:tc>
-                <a:tc>
-                  <a:txBody>
-                    <a:bodyPr/>
-                    <a:lstStyle/>
-                    <a:p>
-                      <a:r>
-                        <a:rPr sz="1100">
-                          <a:solidFill>
-                            <a:srgbClr val="141C1A"/>
-                          </a:solidFill>
-                        </a:rPr>
-                        <a:t>6.38%</a:t>
-                      </a:r>
-                    </a:p>
-                  </a:txBody>
-                  <a:tcPr/>
-                </a:tc>
-                <a:tc>
-                  <a:txBody>
-                    <a:bodyPr/>
-                    <a:lstStyle/>
-                    <a:p>
-                      <a:r>
-                        <a:rPr sz="1100">
-                          <a:solidFill>
-                            <a:srgbClr val="141C1A"/>
-                          </a:solidFill>
-                        </a:rPr>
-                        <a:t>-0.771</a:t>
+                        <a:t>28.02</a:t>
+                      </a:r>
+                    </a:p>
+                  </a:txBody>
+                  <a:tcPr/>
+                </a:tc>
+                <a:tc>
+                  <a:txBody>
+                    <a:bodyPr/>
+                    <a:lstStyle/>
+                    <a:p>
+                      <a:r>
+                        <a:rPr sz="1100">
+                          <a:solidFill>
+                            <a:srgbClr val="141C1A"/>
+                          </a:solidFill>
+                        </a:rPr>
+                        <a:t>28.02</a:t>
+                      </a:r>
+                    </a:p>
+                  </a:txBody>
+                  <a:tcPr/>
+                </a:tc>
+                <a:tc>
+                  <a:txBody>
+                    <a:bodyPr/>
+                    <a:lstStyle/>
+                    <a:p>
+                      <a:r>
+                        <a:rPr sz="1100">
+                          <a:solidFill>
+                            <a:srgbClr val="141C1A"/>
+                          </a:solidFill>
+                        </a:rPr>
+                        <a:t>11.57%</a:t>
+                      </a:r>
+                    </a:p>
+                  </a:txBody>
+                  <a:tcPr/>
+                </a:tc>
+                <a:tc>
+                  <a:txBody>
+                    <a:bodyPr/>
+                    <a:lstStyle/>
+                    <a:p>
+                      <a:r>
+                        <a:rPr sz="1100">
+                          <a:solidFill>
+                            <a:srgbClr val="141C1A"/>
+                          </a:solidFill>
+                        </a:rPr>
+                        <a:t>—</a:t>
                       </a:r>
                     </a:p>
                   </a:txBody>
@@ -7277,41 +7276,41 @@
                             <a:srgbClr val="141C1A"/>
                           </a:solidFill>
                         </a:rPr>
-                        <a:t>13.58</a:t>
-                      </a:r>
-                    </a:p>
-                  </a:txBody>
-                  <a:tcPr/>
-                </a:tc>
-                <a:tc>
-                  <a:txBody>
-                    <a:bodyPr/>
-                    <a:lstStyle/>
-                    <a:p>
-                      <a:r>
-                        <a:rPr sz="1100">
-                          <a:solidFill>
-                            <a:srgbClr val="141C1A"/>
-                          </a:solidFill>
-                        </a:rPr>
-                        <a:t>15.92</a:t>
-                      </a:r>
-                    </a:p>
-                  </a:txBody>
-                  <a:tcPr/>
-                </a:tc>
-                <a:tc>
-                  <a:txBody>
-                    <a:bodyPr/>
-                    <a:lstStyle/>
-                    <a:p>
-                      <a:r>
-                        <a:rPr sz="1100">
-                          <a:solidFill>
-                            <a:srgbClr val="141C1A"/>
-                          </a:solidFill>
-                        </a:rPr>
-                        <a:t>9.33%</a:t>
+                        <a:t>6.00</a:t>
+                      </a:r>
+                    </a:p>
+                  </a:txBody>
+                  <a:tcPr/>
+                </a:tc>
+                <a:tc>
+                  <a:txBody>
+                    <a:bodyPr/>
+                    <a:lstStyle/>
+                    <a:p>
+                      <a:r>
+                        <a:rPr sz="1100">
+                          <a:solidFill>
+                            <a:srgbClr val="141C1A"/>
+                          </a:solidFill>
+                        </a:rPr>
+                        <a:t>6.19</a:t>
+                      </a:r>
+                    </a:p>
+                  </a:txBody>
+                  <a:tcPr/>
+                </a:tc>
+                <a:tc>
+                  <a:txBody>
+                    <a:bodyPr/>
+                    <a:lstStyle/>
+                    <a:p>
+                      <a:r>
+                        <a:rPr sz="1100">
+                          <a:solidFill>
+                            <a:srgbClr val="141C1A"/>
+                          </a:solidFill>
+                        </a:rPr>
+                        <a:t>4.64%</a:t>
                       </a:r>
                     </a:p>
                   </a:txBody>
@@ -7338,7 +7337,16 @@
                   <a:txBody>
                     <a:bodyPr/>
                     <a:lstStyle/>
-                    <a:p/>
+                    <a:p>
+                      <a:r>
+                        <a:rPr sz="1100">
+                          <a:solidFill>
+                            <a:srgbClr val="141C1A"/>
+                          </a:solidFill>
+                        </a:rPr>
+                        <a:t>✓</a:t>
+                      </a:r>
+                    </a:p>
                   </a:txBody>
                   <a:tcPr/>
                 </a:tc>
@@ -7389,58 +7397,58 @@
                             <a:srgbClr val="141C1A"/>
                           </a:solidFill>
                         </a:rPr>
-                        <a:t>35.00</a:t>
-                      </a:r>
-                    </a:p>
-                  </a:txBody>
-                  <a:tcPr/>
-                </a:tc>
-                <a:tc>
-                  <a:txBody>
-                    <a:bodyPr/>
-                    <a:lstStyle/>
-                    <a:p>
-                      <a:r>
-                        <a:rPr sz="1100">
-                          <a:solidFill>
-                            <a:srgbClr val="141C1A"/>
-                          </a:solidFill>
-                        </a:rPr>
-                        <a:t>38.19</a:t>
-                      </a:r>
-                    </a:p>
-                  </a:txBody>
-                  <a:tcPr/>
-                </a:tc>
-                <a:tc>
-                  <a:txBody>
-                    <a:bodyPr/>
-                    <a:lstStyle/>
-                    <a:p>
-                      <a:r>
-                        <a:rPr sz="1100">
-                          <a:solidFill>
-                            <a:srgbClr val="141C1A"/>
-                          </a:solidFill>
-                        </a:rPr>
-                        <a:t>25.86%</a:t>
-                      </a:r>
-                    </a:p>
-                  </a:txBody>
-                  <a:tcPr/>
-                </a:tc>
-                <a:tc>
-                  <a:txBody>
-                    <a:bodyPr/>
-                    <a:lstStyle/>
-                    <a:p>
-                      <a:r>
-                        <a:rPr sz="1100">
-                          <a:solidFill>
-                            <a:srgbClr val="141C1A"/>
-                          </a:solidFill>
-                        </a:rPr>
-                        <a:t>-377.052</a:t>
+                        <a:t>9.72</a:t>
+                      </a:r>
+                    </a:p>
+                  </a:txBody>
+                  <a:tcPr/>
+                </a:tc>
+                <a:tc>
+                  <a:txBody>
+                    <a:bodyPr/>
+                    <a:lstStyle/>
+                    <a:p>
+                      <a:r>
+                        <a:rPr sz="1100">
+                          <a:solidFill>
+                            <a:srgbClr val="141C1A"/>
+                          </a:solidFill>
+                        </a:rPr>
+                        <a:t>9.72</a:t>
+                      </a:r>
+                    </a:p>
+                  </a:txBody>
+                  <a:tcPr/>
+                </a:tc>
+                <a:tc>
+                  <a:txBody>
+                    <a:bodyPr/>
+                    <a:lstStyle/>
+                    <a:p>
+                      <a:r>
+                        <a:rPr sz="1100">
+                          <a:solidFill>
+                            <a:srgbClr val="141C1A"/>
+                          </a:solidFill>
+                        </a:rPr>
+                        <a:t>7.74%</a:t>
+                      </a:r>
+                    </a:p>
+                  </a:txBody>
+                  <a:tcPr/>
+                </a:tc>
+                <a:tc>
+                  <a:txBody>
+                    <a:bodyPr/>
+                    <a:lstStyle/>
+                    <a:p>
+                      <a:r>
+                        <a:rPr sz="1100">
+                          <a:solidFill>
+                            <a:srgbClr val="141C1A"/>
+                          </a:solidFill>
+                        </a:rPr>
+                        <a:t>—</a:t>
                       </a:r>
                     </a:p>
                   </a:txBody>
@@ -7501,77 +7509,68 @@
                             <a:srgbClr val="141C1A"/>
                           </a:solidFill>
                         </a:rPr>
-                        <a:t>10.81</a:t>
-                      </a:r>
-                    </a:p>
-                  </a:txBody>
-                  <a:tcPr/>
-                </a:tc>
-                <a:tc>
-                  <a:txBody>
-                    <a:bodyPr/>
-                    <a:lstStyle/>
-                    <a:p>
-                      <a:r>
-                        <a:rPr sz="1100">
-                          <a:solidFill>
-                            <a:srgbClr val="141C1A"/>
-                          </a:solidFill>
-                        </a:rPr>
-                        <a:t>12.42</a:t>
-                      </a:r>
-                    </a:p>
-                  </a:txBody>
-                  <a:tcPr/>
-                </a:tc>
-                <a:tc>
-                  <a:txBody>
-                    <a:bodyPr/>
-                    <a:lstStyle/>
-                    <a:p>
-                      <a:r>
-                        <a:rPr sz="1100">
-                          <a:solidFill>
-                            <a:srgbClr val="141C1A"/>
-                          </a:solidFill>
-                        </a:rPr>
-                        <a:t>7.41%</a:t>
-                      </a:r>
-                    </a:p>
-                  </a:txBody>
-                  <a:tcPr/>
-                </a:tc>
-                <a:tc>
-                  <a:txBody>
-                    <a:bodyPr/>
-                    <a:lstStyle/>
-                    <a:p>
-                      <a:r>
-                        <a:rPr sz="1100">
-                          <a:solidFill>
-                            <a:srgbClr val="141C1A"/>
-                          </a:solidFill>
-                        </a:rPr>
-                        <a:t>-6.443</a:t>
-                      </a:r>
-                    </a:p>
-                  </a:txBody>
-                  <a:tcPr/>
-                </a:tc>
-                <a:tc>
-                  <a:txBody>
-                    <a:bodyPr/>
-                    <a:lstStyle/>
-                    <a:p>
-                      <a:r>
-                        <a:rPr sz="1100">
-                          <a:solidFill>
-                            <a:srgbClr val="141C1A"/>
-                          </a:solidFill>
-                        </a:rPr>
-                        <a:t>✓</a:t>
-                      </a:r>
-                    </a:p>
+                        <a:t>6.53</a:t>
+                      </a:r>
+                    </a:p>
+                  </a:txBody>
+                  <a:tcPr/>
+                </a:tc>
+                <a:tc>
+                  <a:txBody>
+                    <a:bodyPr/>
+                    <a:lstStyle/>
+                    <a:p>
+                      <a:r>
+                        <a:rPr sz="1100">
+                          <a:solidFill>
+                            <a:srgbClr val="141C1A"/>
+                          </a:solidFill>
+                        </a:rPr>
+                        <a:t>6.53</a:t>
+                      </a:r>
+                    </a:p>
+                  </a:txBody>
+                  <a:tcPr/>
+                </a:tc>
+                <a:tc>
+                  <a:txBody>
+                    <a:bodyPr/>
+                    <a:lstStyle/>
+                    <a:p>
+                      <a:r>
+                        <a:rPr sz="1100">
+                          <a:solidFill>
+                            <a:srgbClr val="141C1A"/>
+                          </a:solidFill>
+                        </a:rPr>
+                        <a:t>5.24%</a:t>
+                      </a:r>
+                    </a:p>
+                  </a:txBody>
+                  <a:tcPr/>
+                </a:tc>
+                <a:tc>
+                  <a:txBody>
+                    <a:bodyPr/>
+                    <a:lstStyle/>
+                    <a:p>
+                      <a:r>
+                        <a:rPr sz="1100">
+                          <a:solidFill>
+                            <a:srgbClr val="141C1A"/>
+                          </a:solidFill>
+                        </a:rPr>
+                        <a:t>—</a:t>
+                      </a:r>
+                    </a:p>
+                  </a:txBody>
+                  <a:tcPr/>
+                </a:tc>
+                <a:tc>
+                  <a:txBody>
+                    <a:bodyPr/>
+                    <a:lstStyle/>
+                    <a:p/>
                   </a:txBody>
                   <a:tcPr/>
                 </a:tc>
@@ -7622,41 +7621,41 @@
                             <a:srgbClr val="141C1A"/>
                           </a:solidFill>
                         </a:rPr>
-                        <a:t>11.01</a:t>
-                      </a:r>
-                    </a:p>
-                  </a:txBody>
-                  <a:tcPr/>
-                </a:tc>
-                <a:tc>
-                  <a:txBody>
-                    <a:bodyPr/>
-                    <a:lstStyle/>
-                    <a:p>
-                      <a:r>
-                        <a:rPr sz="1100">
-                          <a:solidFill>
-                            <a:srgbClr val="141C1A"/>
-                          </a:solidFill>
-                        </a:rPr>
-                        <a:t>12.84</a:t>
-                      </a:r>
-                    </a:p>
-                  </a:txBody>
-                  <a:tcPr/>
-                </a:tc>
-                <a:tc>
-                  <a:txBody>
-                    <a:bodyPr/>
-                    <a:lstStyle/>
-                    <a:p>
-                      <a:r>
-                        <a:rPr sz="1100">
-                          <a:solidFill>
-                            <a:srgbClr val="141C1A"/>
-                          </a:solidFill>
-                        </a:rPr>
-                        <a:t>7.56%</a:t>
+                        <a:t>10.83</a:t>
+                      </a:r>
+                    </a:p>
+                  </a:txBody>
+                  <a:tcPr/>
+                </a:tc>
+                <a:tc>
+                  <a:txBody>
+                    <a:bodyPr/>
+                    <a:lstStyle/>
+                    <a:p>
+                      <a:r>
+                        <a:rPr sz="1100">
+                          <a:solidFill>
+                            <a:srgbClr val="141C1A"/>
+                          </a:solidFill>
+                        </a:rPr>
+                        <a:t>12.59</a:t>
+                      </a:r>
+                    </a:p>
+                  </a:txBody>
+                  <a:tcPr/>
+                </a:tc>
+                <a:tc>
+                  <a:txBody>
+                    <a:bodyPr/>
+                    <a:lstStyle/>
+                    <a:p>
+                      <a:r>
+                        <a:rPr sz="1100">
+                          <a:solidFill>
+                            <a:srgbClr val="141C1A"/>
+                          </a:solidFill>
+                        </a:rPr>
+                        <a:t>7.41%</a:t>
                       </a:r>
                     </a:p>
                   </a:txBody>
@@ -7683,16 +7682,7 @@
                   <a:txBody>
                     <a:bodyPr/>
                     <a:lstStyle/>
-                    <a:p>
-                      <a:r>
-                        <a:rPr sz="1100">
-                          <a:solidFill>
-                            <a:srgbClr val="141C1A"/>
-                          </a:solidFill>
-                        </a:rPr>
-                        <a:t>✓</a:t>
-                      </a:r>
-                    </a:p>
+                    <a:p/>
                   </a:txBody>
                   <a:tcPr/>
                 </a:tc>
@@ -7743,68 +7733,77 @@
                             <a:srgbClr val="141C1A"/>
                           </a:solidFill>
                         </a:rPr>
-                        <a:t>12.36</a:t>
-                      </a:r>
-                    </a:p>
-                  </a:txBody>
-                  <a:tcPr/>
-                </a:tc>
-                <a:tc>
-                  <a:txBody>
-                    <a:bodyPr/>
-                    <a:lstStyle/>
-                    <a:p>
-                      <a:r>
-                        <a:rPr sz="1100">
-                          <a:solidFill>
-                            <a:srgbClr val="141C1A"/>
-                          </a:solidFill>
-                        </a:rPr>
-                        <a:t>14.07</a:t>
-                      </a:r>
-                    </a:p>
-                  </a:txBody>
-                  <a:tcPr/>
-                </a:tc>
-                <a:tc>
-                  <a:txBody>
-                    <a:bodyPr/>
-                    <a:lstStyle/>
-                    <a:p>
-                      <a:r>
-                        <a:rPr sz="1100">
-                          <a:solidFill>
-                            <a:srgbClr val="141C1A"/>
-                          </a:solidFill>
-                        </a:rPr>
-                        <a:t>8.33%</a:t>
-                      </a:r>
-                    </a:p>
-                  </a:txBody>
-                  <a:tcPr/>
-                </a:tc>
-                <a:tc>
-                  <a:txBody>
-                    <a:bodyPr/>
-                    <a:lstStyle/>
-                    <a:p>
-                      <a:r>
-                        <a:rPr sz="1100">
-                          <a:solidFill>
-                            <a:srgbClr val="141C1A"/>
-                          </a:solidFill>
-                        </a:rPr>
-                        <a:t>-17.397</a:t>
-                      </a:r>
-                    </a:p>
-                  </a:txBody>
-                  <a:tcPr/>
-                </a:tc>
-                <a:tc>
-                  <a:txBody>
-                    <a:bodyPr/>
-                    <a:lstStyle/>
-                    <a:p/>
+                        <a:t>8.44</a:t>
+                      </a:r>
+                    </a:p>
+                  </a:txBody>
+                  <a:tcPr/>
+                </a:tc>
+                <a:tc>
+                  <a:txBody>
+                    <a:bodyPr/>
+                    <a:lstStyle/>
+                    <a:p>
+                      <a:r>
+                        <a:rPr sz="1100">
+                          <a:solidFill>
+                            <a:srgbClr val="141C1A"/>
+                          </a:solidFill>
+                        </a:rPr>
+                        <a:t>8.44</a:t>
+                      </a:r>
+                    </a:p>
+                  </a:txBody>
+                  <a:tcPr/>
+                </a:tc>
+                <a:tc>
+                  <a:txBody>
+                    <a:bodyPr/>
+                    <a:lstStyle/>
+                    <a:p>
+                      <a:r>
+                        <a:rPr sz="1100">
+                          <a:solidFill>
+                            <a:srgbClr val="141C1A"/>
+                          </a:solidFill>
+                        </a:rPr>
+                        <a:t>6.43%</a:t>
+                      </a:r>
+                    </a:p>
+                  </a:txBody>
+                  <a:tcPr/>
+                </a:tc>
+                <a:tc>
+                  <a:txBody>
+                    <a:bodyPr/>
+                    <a:lstStyle/>
+                    <a:p>
+                      <a:r>
+                        <a:rPr sz="1100">
+                          <a:solidFill>
+                            <a:srgbClr val="141C1A"/>
+                          </a:solidFill>
+                        </a:rPr>
+                        <a:t>—</a:t>
+                      </a:r>
+                    </a:p>
+                  </a:txBody>
+                  <a:tcPr/>
+                </a:tc>
+                <a:tc>
+                  <a:txBody>
+                    <a:bodyPr/>
+                    <a:lstStyle/>
+                    <a:p>
+                      <a:r>
+                        <a:rPr sz="1100">
+                          <a:solidFill>
+                            <a:srgbClr val="141C1A"/>
+                          </a:solidFill>
+                        </a:rPr>
+                        <a:t>✓</a:t>
+                      </a:r>
+                    </a:p>
                   </a:txBody>
                   <a:tcPr/>
                 </a:tc>
@@ -7855,58 +7854,58 @@
                             <a:srgbClr val="141C1A"/>
                           </a:solidFill>
                         </a:rPr>
-                        <a:t>13.72</a:t>
-                      </a:r>
-                    </a:p>
-                  </a:txBody>
-                  <a:tcPr/>
-                </a:tc>
-                <a:tc>
-                  <a:txBody>
-                    <a:bodyPr/>
-                    <a:lstStyle/>
-                    <a:p>
-                      <a:r>
-                        <a:rPr sz="1100">
-                          <a:solidFill>
-                            <a:srgbClr val="141C1A"/>
-                          </a:solidFill>
-                        </a:rPr>
-                        <a:t>14.56</a:t>
-                      </a:r>
-                    </a:p>
-                  </a:txBody>
-                  <a:tcPr/>
-                </a:tc>
-                <a:tc>
-                  <a:txBody>
-                    <a:bodyPr/>
-                    <a:lstStyle/>
-                    <a:p>
-                      <a:r>
-                        <a:rPr sz="1100">
-                          <a:solidFill>
-                            <a:srgbClr val="141C1A"/>
-                          </a:solidFill>
-                        </a:rPr>
-                        <a:t>9.59%</a:t>
-                      </a:r>
-                    </a:p>
-                  </a:txBody>
-                  <a:tcPr/>
-                </a:tc>
-                <a:tc>
-                  <a:txBody>
-                    <a:bodyPr/>
-                    <a:lstStyle/>
-                    <a:p>
-                      <a:r>
-                        <a:rPr sz="1100">
-                          <a:solidFill>
-                            <a:srgbClr val="141C1A"/>
-                          </a:solidFill>
-                        </a:rPr>
-                        <a:t>-17.236</a:t>
+                        <a:t>9.22</a:t>
+                      </a:r>
+                    </a:p>
+                  </a:txBody>
+                  <a:tcPr/>
+                </a:tc>
+                <a:tc>
+                  <a:txBody>
+                    <a:bodyPr/>
+                    <a:lstStyle/>
+                    <a:p>
+                      <a:r>
+                        <a:rPr sz="1100">
+                          <a:solidFill>
+                            <a:srgbClr val="141C1A"/>
+                          </a:solidFill>
+                        </a:rPr>
+                        <a:t>9.22</a:t>
+                      </a:r>
+                    </a:p>
+                  </a:txBody>
+                  <a:tcPr/>
+                </a:tc>
+                <a:tc>
+                  <a:txBody>
+                    <a:bodyPr/>
+                    <a:lstStyle/>
+                    <a:p>
+                      <a:r>
+                        <a:rPr sz="1100">
+                          <a:solidFill>
+                            <a:srgbClr val="141C1A"/>
+                          </a:solidFill>
+                        </a:rPr>
+                        <a:t>7.07%</a:t>
+                      </a:r>
+                    </a:p>
+                  </a:txBody>
+                  <a:tcPr/>
+                </a:tc>
+                <a:tc>
+                  <a:txBody>
+                    <a:bodyPr/>
+                    <a:lstStyle/>
+                    <a:p>
+                      <a:r>
+                        <a:rPr sz="1100">
+                          <a:solidFill>
+                            <a:srgbClr val="141C1A"/>
+                          </a:solidFill>
+                        </a:rPr>
+                        <a:t>—</a:t>
                       </a:r>
                     </a:p>
                   </a:txBody>
@@ -8261,92 +8260,92 @@
                             <a:srgbClr val="141C1A"/>
                           </a:solidFill>
                         </a:rPr>
-                        <a:t>5.08%</a:t>
-                      </a:r>
-                    </a:p>
-                  </a:txBody>
-                  <a:tcPr/>
-                </a:tc>
-                <a:tc>
-                  <a:txBody>
-                    <a:bodyPr/>
-                    <a:lstStyle/>
-                    <a:p>
-                      <a:r>
-                        <a:rPr sz="1100">
-                          <a:solidFill>
-                            <a:srgbClr val="141C1A"/>
-                          </a:solidFill>
-                        </a:rPr>
-                        <a:t>12.91</a:t>
-                      </a:r>
-                    </a:p>
-                  </a:txBody>
-                  <a:tcPr/>
-                </a:tc>
-                <a:tc>
-                  <a:txBody>
-                    <a:bodyPr/>
-                    <a:lstStyle/>
-                    <a:p>
-                      <a:r>
-                        <a:rPr sz="1100">
-                          <a:solidFill>
-                            <a:srgbClr val="141C1A"/>
-                          </a:solidFill>
-                        </a:rPr>
-                        <a:t>+9.33</a:t>
-                      </a:r>
-                    </a:p>
-                  </a:txBody>
-                  <a:tcPr/>
-                </a:tc>
-                <a:tc>
-                  <a:txBody>
-                    <a:bodyPr/>
-                    <a:lstStyle/>
-                    <a:p>
-                      <a:r>
-                        <a:rPr sz="1100">
-                          <a:solidFill>
-                            <a:srgbClr val="141C1A"/>
-                          </a:solidFill>
-                        </a:rPr>
-                        <a:t>33.3%</a:t>
-                      </a:r>
-                    </a:p>
-                  </a:txBody>
-                  <a:tcPr/>
-                </a:tc>
-                <a:tc>
-                  <a:txBody>
-                    <a:bodyPr/>
-                    <a:lstStyle/>
-                    <a:p>
-                      <a:r>
-                        <a:rPr sz="1100">
-                          <a:solidFill>
-                            <a:srgbClr val="141C1A"/>
-                          </a:solidFill>
-                        </a:rPr>
-                        <a:t>3.77%</a:t>
-                      </a:r>
-                    </a:p>
-                  </a:txBody>
-                  <a:tcPr/>
-                </a:tc>
-                <a:tc>
-                  <a:txBody>
-                    <a:bodyPr/>
-                    <a:lstStyle/>
-                    <a:p>
-                      <a:r>
-                        <a:rPr sz="1100">
-                          <a:solidFill>
-                            <a:srgbClr val="141C1A"/>
-                          </a:solidFill>
-                        </a:rPr>
-                        <a:t>-34.8%</a:t>
+                        <a:t>27.76%</a:t>
+                      </a:r>
+                    </a:p>
+                  </a:txBody>
+                  <a:tcPr/>
+                </a:tc>
+                <a:tc>
+                  <a:txBody>
+                    <a:bodyPr/>
+                    <a:lstStyle/>
+                    <a:p>
+                      <a:r>
+                        <a:rPr sz="1100">
+                          <a:solidFill>
+                            <a:srgbClr val="141C1A"/>
+                          </a:solidFill>
+                        </a:rPr>
+                        <a:t>65.36</a:t>
+                      </a:r>
+                    </a:p>
+                  </a:txBody>
+                  <a:tcPr/>
+                </a:tc>
+                <a:tc>
+                  <a:txBody>
+                    <a:bodyPr/>
+                    <a:lstStyle/>
+                    <a:p>
+                      <a:r>
+                        <a:rPr sz="1100">
+                          <a:solidFill>
+                            <a:srgbClr val="141C1A"/>
+                          </a:solidFill>
+                        </a:rPr>
+                        <a:t>-41.50</a:t>
+                      </a:r>
+                    </a:p>
+                  </a:txBody>
+                  <a:tcPr/>
+                </a:tc>
+                <a:tc>
+                  <a:txBody>
+                    <a:bodyPr/>
+                    <a:lstStyle/>
+                    <a:p>
+                      <a:r>
+                        <a:rPr sz="1100">
+                          <a:solidFill>
+                            <a:srgbClr val="141C1A"/>
+                          </a:solidFill>
+                        </a:rPr>
+                        <a:t>100.0%</a:t>
+                      </a:r>
+                    </a:p>
+                  </a:txBody>
+                  <a:tcPr/>
+                </a:tc>
+                <a:tc>
+                  <a:txBody>
+                    <a:bodyPr/>
+                    <a:lstStyle/>
+                    <a:p>
+                      <a:r>
+                        <a:rPr sz="1100">
+                          <a:solidFill>
+                            <a:srgbClr val="141C1A"/>
+                          </a:solidFill>
+                        </a:rPr>
+                        <a:t>27.76%</a:t>
+                      </a:r>
+                    </a:p>
+                  </a:txBody>
+                  <a:tcPr/>
+                </a:tc>
+                <a:tc>
+                  <a:txBody>
+                    <a:bodyPr/>
+                    <a:lstStyle/>
+                    <a:p>
+                      <a:r>
+                        <a:rPr sz="1100">
+                          <a:solidFill>
+                            <a:srgbClr val="141C1A"/>
+                          </a:solidFill>
+                        </a:rPr>
+                        <a:t>+0.0%</a:t>
                       </a:r>
                     </a:p>
                   </a:txBody>
@@ -8382,92 +8381,92 @@
                             <a:srgbClr val="141C1A"/>
                           </a:solidFill>
                         </a:rPr>
-                        <a:t>11.54%</a:t>
-                      </a:r>
-                    </a:p>
-                  </a:txBody>
-                  <a:tcPr/>
-                </a:tc>
-                <a:tc>
-                  <a:txBody>
-                    <a:bodyPr/>
-                    <a:lstStyle/>
-                    <a:p>
-                      <a:r>
-                        <a:rPr sz="1100">
-                          <a:solidFill>
-                            <a:srgbClr val="141C1A"/>
-                          </a:solidFill>
-                        </a:rPr>
-                        <a:t>35.49</a:t>
-                      </a:r>
-                    </a:p>
-                  </a:txBody>
-                  <a:tcPr/>
-                </a:tc>
-                <a:tc>
-                  <a:txBody>
-                    <a:bodyPr/>
-                    <a:lstStyle/>
-                    <a:p>
-                      <a:r>
-                        <a:rPr sz="1100">
-                          <a:solidFill>
-                            <a:srgbClr val="141C1A"/>
-                          </a:solidFill>
-                        </a:rPr>
-                        <a:t>+33.08</a:t>
-                      </a:r>
-                    </a:p>
-                  </a:txBody>
-                  <a:tcPr/>
-                </a:tc>
-                <a:tc>
-                  <a:txBody>
-                    <a:bodyPr/>
-                    <a:lstStyle/>
-                    <a:p>
-                      <a:r>
-                        <a:rPr sz="1100">
-                          <a:solidFill>
-                            <a:srgbClr val="141C1A"/>
-                          </a:solidFill>
-                        </a:rPr>
-                        <a:t>50.0%</a:t>
-                      </a:r>
-                    </a:p>
-                  </a:txBody>
-                  <a:tcPr/>
-                </a:tc>
-                <a:tc>
-                  <a:txBody>
-                    <a:bodyPr/>
-                    <a:lstStyle/>
-                    <a:p>
-                      <a:r>
-                        <a:rPr sz="1100">
-                          <a:solidFill>
-                            <a:srgbClr val="141C1A"/>
-                          </a:solidFill>
-                        </a:rPr>
-                        <a:t>11.02%</a:t>
-                      </a:r>
-                    </a:p>
-                  </a:txBody>
-                  <a:tcPr/>
-                </a:tc>
-                <a:tc>
-                  <a:txBody>
-                    <a:bodyPr/>
-                    <a:lstStyle/>
-                    <a:p>
-                      <a:r>
-                        <a:rPr sz="1100">
-                          <a:solidFill>
-                            <a:srgbClr val="141C1A"/>
-                          </a:solidFill>
-                        </a:rPr>
-                        <a:t>-4.8%</a:t>
+                        <a:t>11.46%</a:t>
+                      </a:r>
+                    </a:p>
+                  </a:txBody>
+                  <a:tcPr/>
+                </a:tc>
+                <a:tc>
+                  <a:txBody>
+                    <a:bodyPr/>
+                    <a:lstStyle/>
+                    <a:p>
+                      <a:r>
+                        <a:rPr sz="1100">
+                          <a:solidFill>
+                            <a:srgbClr val="141C1A"/>
+                          </a:solidFill>
+                        </a:rPr>
+                        <a:t>34.76</a:t>
+                      </a:r>
+                    </a:p>
+                  </a:txBody>
+                  <a:tcPr/>
+                </a:tc>
+                <a:tc>
+                  <a:txBody>
+                    <a:bodyPr/>
+                    <a:lstStyle/>
+                    <a:p>
+                      <a:r>
+                        <a:rPr sz="1100">
+                          <a:solidFill>
+                            <a:srgbClr val="141C1A"/>
+                          </a:solidFill>
+                        </a:rPr>
+                        <a:t>-22.50</a:t>
+                      </a:r>
+                    </a:p>
+                  </a:txBody>
+                  <a:tcPr/>
+                </a:tc>
+                <a:tc>
+                  <a:txBody>
+                    <a:bodyPr/>
+                    <a:lstStyle/>
+                    <a:p>
+                      <a:r>
+                        <a:rPr sz="1100">
+                          <a:solidFill>
+                            <a:srgbClr val="141C1A"/>
+                          </a:solidFill>
+                        </a:rPr>
+                        <a:t>100.0%</a:t>
+                      </a:r>
+                    </a:p>
+                  </a:txBody>
+                  <a:tcPr/>
+                </a:tc>
+                <a:tc>
+                  <a:txBody>
+                    <a:bodyPr/>
+                    <a:lstStyle/>
+                    <a:p>
+                      <a:r>
+                        <a:rPr sz="1100">
+                          <a:solidFill>
+                            <a:srgbClr val="141C1A"/>
+                          </a:solidFill>
+                        </a:rPr>
+                        <a:t>11.46%</a:t>
+                      </a:r>
+                    </a:p>
+                  </a:txBody>
+                  <a:tcPr/>
+                </a:tc>
+                <a:tc>
+                  <a:txBody>
+                    <a:bodyPr/>
+                    <a:lstStyle/>
+                    <a:p>
+                      <a:r>
+                        <a:rPr sz="1100">
+                          <a:solidFill>
+                            <a:srgbClr val="141C1A"/>
+                          </a:solidFill>
+                        </a:rPr>
+                        <a:t>+0.0%</a:t>
                       </a:r>
                     </a:p>
                   </a:txBody>
@@ -8503,92 +8502,92 @@
                             <a:srgbClr val="141C1A"/>
                           </a:solidFill>
                         </a:rPr>
-                        <a:t>9.02%</a:t>
-                      </a:r>
-                    </a:p>
-                  </a:txBody>
-                  <a:tcPr/>
-                </a:tc>
-                <a:tc>
-                  <a:txBody>
-                    <a:bodyPr/>
-                    <a:lstStyle/>
-                    <a:p>
-                      <a:r>
-                        <a:rPr sz="1100">
-                          <a:solidFill>
-                            <a:srgbClr val="141C1A"/>
-                          </a:solidFill>
-                        </a:rPr>
-                        <a:t>31.09</a:t>
-                      </a:r>
-                    </a:p>
-                  </a:txBody>
-                  <a:tcPr/>
-                </a:tc>
-                <a:tc>
-                  <a:txBody>
-                    <a:bodyPr/>
-                    <a:lstStyle/>
-                    <a:p>
-                      <a:r>
-                        <a:rPr sz="1100">
-                          <a:solidFill>
-                            <a:srgbClr val="141C1A"/>
-                          </a:solidFill>
-                        </a:rPr>
-                        <a:t>-4.14</a:t>
-                      </a:r>
-                    </a:p>
-                  </a:txBody>
-                  <a:tcPr/>
-                </a:tc>
-                <a:tc>
-                  <a:txBody>
-                    <a:bodyPr/>
-                    <a:lstStyle/>
-                    <a:p>
-                      <a:r>
-                        <a:rPr sz="1100">
-                          <a:solidFill>
-                            <a:srgbClr val="141C1A"/>
-                          </a:solidFill>
-                        </a:rPr>
-                        <a:t>83.3%</a:t>
-                      </a:r>
-                    </a:p>
-                  </a:txBody>
-                  <a:tcPr/>
-                </a:tc>
-                <a:tc>
-                  <a:txBody>
-                    <a:bodyPr/>
-                    <a:lstStyle/>
-                    <a:p>
-                      <a:r>
-                        <a:rPr sz="1100">
-                          <a:solidFill>
-                            <a:srgbClr val="141C1A"/>
-                          </a:solidFill>
-                        </a:rPr>
-                        <a:t>8.41%</a:t>
-                      </a:r>
-                    </a:p>
-                  </a:txBody>
-                  <a:tcPr/>
-                </a:tc>
-                <a:tc>
-                  <a:txBody>
-                    <a:bodyPr/>
-                    <a:lstStyle/>
-                    <a:p>
-                      <a:r>
-                        <a:rPr sz="1100">
-                          <a:solidFill>
-                            <a:srgbClr val="141C1A"/>
-                          </a:solidFill>
-                        </a:rPr>
-                        <a:t>-7.3%</a:t>
+                        <a:t>7.73%</a:t>
+                      </a:r>
+                    </a:p>
+                  </a:txBody>
+                  <a:tcPr/>
+                </a:tc>
+                <a:tc>
+                  <a:txBody>
+                    <a:bodyPr/>
+                    <a:lstStyle/>
+                    <a:p>
+                      <a:r>
+                        <a:rPr sz="1100">
+                          <a:solidFill>
+                            <a:srgbClr val="141C1A"/>
+                          </a:solidFill>
+                        </a:rPr>
+                        <a:t>21.10</a:t>
+                      </a:r>
+                    </a:p>
+                  </a:txBody>
+                  <a:tcPr/>
+                </a:tc>
+                <a:tc>
+                  <a:txBody>
+                    <a:bodyPr/>
+                    <a:lstStyle/>
+                    <a:p>
+                      <a:r>
+                        <a:rPr sz="1100">
+                          <a:solidFill>
+                            <a:srgbClr val="141C1A"/>
+                          </a:solidFill>
+                        </a:rPr>
+                        <a:t>-18.00</a:t>
+                      </a:r>
+                    </a:p>
+                  </a:txBody>
+                  <a:tcPr/>
+                </a:tc>
+                <a:tc>
+                  <a:txBody>
+                    <a:bodyPr/>
+                    <a:lstStyle/>
+                    <a:p>
+                      <a:r>
+                        <a:rPr sz="1100">
+                          <a:solidFill>
+                            <a:srgbClr val="141C1A"/>
+                          </a:solidFill>
+                        </a:rPr>
+                        <a:t>0.0%</a:t>
+                      </a:r>
+                    </a:p>
+                  </a:txBody>
+                  <a:tcPr/>
+                </a:tc>
+                <a:tc>
+                  <a:txBody>
+                    <a:bodyPr/>
+                    <a:lstStyle/>
+                    <a:p>
+                      <a:r>
+                        <a:rPr sz="1100">
+                          <a:solidFill>
+                            <a:srgbClr val="141C1A"/>
+                          </a:solidFill>
+                        </a:rPr>
+                        <a:t>7.73%</a:t>
+                      </a:r>
+                    </a:p>
+                  </a:txBody>
+                  <a:tcPr/>
+                </a:tc>
+                <a:tc>
+                  <a:txBody>
+                    <a:bodyPr/>
+                    <a:lstStyle/>
+                    <a:p>
+                      <a:r>
+                        <a:rPr sz="1100">
+                          <a:solidFill>
+                            <a:srgbClr val="141C1A"/>
+                          </a:solidFill>
+                        </a:rPr>
+                        <a:t>+0.0%</a:t>
                       </a:r>
                     </a:p>
                   </a:txBody>
@@ -8624,92 +8623,92 @@
                             <a:srgbClr val="141C1A"/>
                           </a:solidFill>
                         </a:rPr>
-                        <a:t>14.09%</a:t>
-                      </a:r>
-                    </a:p>
-                  </a:txBody>
-                  <a:tcPr/>
-                </a:tc>
-                <a:tc>
-                  <a:txBody>
-                    <a:bodyPr/>
-                    <a:lstStyle/>
-                    <a:p>
-                      <a:r>
-                        <a:rPr sz="1100">
-                          <a:solidFill>
-                            <a:srgbClr val="141C1A"/>
-                          </a:solidFill>
-                        </a:rPr>
-                        <a:t>26.55</a:t>
-                      </a:r>
-                    </a:p>
-                  </a:txBody>
-                  <a:tcPr/>
-                </a:tc>
-                <a:tc>
-                  <a:txBody>
-                    <a:bodyPr/>
-                    <a:lstStyle/>
-                    <a:p>
-                      <a:r>
-                        <a:rPr sz="1100">
-                          <a:solidFill>
-                            <a:srgbClr val="141C1A"/>
-                          </a:solidFill>
-                        </a:rPr>
-                        <a:t>+22.85</a:t>
-                      </a:r>
-                    </a:p>
-                  </a:txBody>
-                  <a:tcPr/>
-                </a:tc>
-                <a:tc>
-                  <a:txBody>
-                    <a:bodyPr/>
-                    <a:lstStyle/>
-                    <a:p>
-                      <a:r>
-                        <a:rPr sz="1100">
-                          <a:solidFill>
-                            <a:srgbClr val="141C1A"/>
-                          </a:solidFill>
-                        </a:rPr>
-                        <a:t>33.3%</a:t>
-                      </a:r>
-                    </a:p>
-                  </a:txBody>
-                  <a:tcPr/>
-                </a:tc>
-                <a:tc>
-                  <a:txBody>
-                    <a:bodyPr/>
-                    <a:lstStyle/>
-                    <a:p>
-                      <a:r>
-                        <a:rPr sz="1100">
-                          <a:solidFill>
-                            <a:srgbClr val="141C1A"/>
-                          </a:solidFill>
-                        </a:rPr>
-                        <a:t>14.94%</a:t>
-                      </a:r>
-                    </a:p>
-                  </a:txBody>
-                  <a:tcPr/>
-                </a:tc>
-                <a:tc>
-                  <a:txBody>
-                    <a:bodyPr/>
-                    <a:lstStyle/>
-                    <a:p>
-                      <a:r>
-                        <a:rPr sz="1100">
-                          <a:solidFill>
-                            <a:srgbClr val="141C1A"/>
-                          </a:solidFill>
-                        </a:rPr>
-                        <a:t>+5.7%</a:t>
+                        <a:t>4.06%</a:t>
+                      </a:r>
+                    </a:p>
+                  </a:txBody>
+                  <a:tcPr/>
+                </a:tc>
+                <a:tc>
+                  <a:txBody>
+                    <a:bodyPr/>
+                    <a:lstStyle/>
+                    <a:p>
+                      <a:r>
+                        <a:rPr sz="1100">
+                          <a:solidFill>
+                            <a:srgbClr val="141C1A"/>
+                          </a:solidFill>
+                        </a:rPr>
+                        <a:t>5.39</a:t>
+                      </a:r>
+                    </a:p>
+                  </a:txBody>
+                  <a:tcPr/>
+                </a:tc>
+                <a:tc>
+                  <a:txBody>
+                    <a:bodyPr/>
+                    <a:lstStyle/>
+                    <a:p>
+                      <a:r>
+                        <a:rPr sz="1100">
+                          <a:solidFill>
+                            <a:srgbClr val="141C1A"/>
+                          </a:solidFill>
+                        </a:rPr>
+                        <a:t>-5.00</a:t>
+                      </a:r>
+                    </a:p>
+                  </a:txBody>
+                  <a:tcPr/>
+                </a:tc>
+                <a:tc>
+                  <a:txBody>
+                    <a:bodyPr/>
+                    <a:lstStyle/>
+                    <a:p>
+                      <a:r>
+                        <a:rPr sz="1100">
+                          <a:solidFill>
+                            <a:srgbClr val="141C1A"/>
+                          </a:solidFill>
+                        </a:rPr>
+                        <a:t>100.0%</a:t>
+                      </a:r>
+                    </a:p>
+                  </a:txBody>
+                  <a:tcPr/>
+                </a:tc>
+                <a:tc>
+                  <a:txBody>
+                    <a:bodyPr/>
+                    <a:lstStyle/>
+                    <a:p>
+                      <a:r>
+                        <a:rPr sz="1100">
+                          <a:solidFill>
+                            <a:srgbClr val="141C1A"/>
+                          </a:solidFill>
+                        </a:rPr>
+                        <a:t>4.06%</a:t>
+                      </a:r>
+                    </a:p>
+                  </a:txBody>
+                  <a:tcPr/>
+                </a:tc>
+                <a:tc>
+                  <a:txBody>
+                    <a:bodyPr/>
+                    <a:lstStyle/>
+                    <a:p>
+                      <a:r>
+                        <a:rPr sz="1100">
+                          <a:solidFill>
+                            <a:srgbClr val="141C1A"/>
+                          </a:solidFill>
+                        </a:rPr>
+                        <a:t>+0.0%</a:t>
                       </a:r>
                     </a:p>
                   </a:txBody>
@@ -8745,92 +8744,92 @@
                             <a:srgbClr val="141C1A"/>
                           </a:solidFill>
                         </a:rPr>
-                        <a:t>11.92%</a:t>
-                      </a:r>
-                    </a:p>
-                  </a:txBody>
-                  <a:tcPr/>
-                </a:tc>
-                <a:tc>
-                  <a:txBody>
-                    <a:bodyPr/>
-                    <a:lstStyle/>
-                    <a:p>
-                      <a:r>
-                        <a:rPr sz="1100">
-                          <a:solidFill>
-                            <a:srgbClr val="141C1A"/>
-                          </a:solidFill>
-                        </a:rPr>
-                        <a:t>18.51</a:t>
-                      </a:r>
-                    </a:p>
-                  </a:txBody>
-                  <a:tcPr/>
-                </a:tc>
-                <a:tc>
-                  <a:txBody>
-                    <a:bodyPr/>
-                    <a:lstStyle/>
-                    <a:p>
-                      <a:r>
-                        <a:rPr sz="1100">
-                          <a:solidFill>
-                            <a:srgbClr val="141C1A"/>
-                          </a:solidFill>
-                        </a:rPr>
-                        <a:t>+18.03</a:t>
-                      </a:r>
-                    </a:p>
-                  </a:txBody>
-                  <a:tcPr/>
-                </a:tc>
-                <a:tc>
-                  <a:txBody>
-                    <a:bodyPr/>
-                    <a:lstStyle/>
-                    <a:p>
-                      <a:r>
-                        <a:rPr sz="1100">
-                          <a:solidFill>
-                            <a:srgbClr val="141C1A"/>
-                          </a:solidFill>
-                        </a:rPr>
-                        <a:t>50.0%</a:t>
-                      </a:r>
-                    </a:p>
-                  </a:txBody>
-                  <a:tcPr/>
-                </a:tc>
-                <a:tc>
-                  <a:txBody>
-                    <a:bodyPr/>
-                    <a:lstStyle/>
-                    <a:p>
-                      <a:r>
-                        <a:rPr sz="1100">
-                          <a:solidFill>
-                            <a:srgbClr val="141C1A"/>
-                          </a:solidFill>
-                        </a:rPr>
-                        <a:t>11.82%</a:t>
-                      </a:r>
-                    </a:p>
-                  </a:txBody>
-                  <a:tcPr/>
-                </a:tc>
-                <a:tc>
-                  <a:txBody>
-                    <a:bodyPr/>
-                    <a:lstStyle/>
-                    <a:p>
-                      <a:r>
-                        <a:rPr sz="1100">
-                          <a:solidFill>
-                            <a:srgbClr val="141C1A"/>
-                          </a:solidFill>
-                        </a:rPr>
-                        <a:t>-0.8%</a:t>
+                        <a:t>7.14%</a:t>
+                      </a:r>
+                    </a:p>
+                  </a:txBody>
+                  <a:tcPr/>
+                </a:tc>
+                <a:tc>
+                  <a:txBody>
+                    <a:bodyPr/>
+                    <a:lstStyle/>
+                    <a:p>
+                      <a:r>
+                        <a:rPr sz="1100">
+                          <a:solidFill>
+                            <a:srgbClr val="141C1A"/>
+                          </a:solidFill>
+                        </a:rPr>
+                        <a:t>12.73</a:t>
+                      </a:r>
+                    </a:p>
+                  </a:txBody>
+                  <a:tcPr/>
+                </a:tc>
+                <a:tc>
+                  <a:txBody>
+                    <a:bodyPr/>
+                    <a:lstStyle/>
+                    <a:p>
+                      <a:r>
+                        <a:rPr sz="1100">
+                          <a:solidFill>
+                            <a:srgbClr val="141C1A"/>
+                          </a:solidFill>
+                        </a:rPr>
+                        <a:t>-9.00</a:t>
+                      </a:r>
+                    </a:p>
+                  </a:txBody>
+                  <a:tcPr/>
+                </a:tc>
+                <a:tc>
+                  <a:txBody>
+                    <a:bodyPr/>
+                    <a:lstStyle/>
+                    <a:p>
+                      <a:r>
+                        <a:rPr sz="1100">
+                          <a:solidFill>
+                            <a:srgbClr val="141C1A"/>
+                          </a:solidFill>
+                        </a:rPr>
+                        <a:t>0.0%</a:t>
+                      </a:r>
+                    </a:p>
+                  </a:txBody>
+                  <a:tcPr/>
+                </a:tc>
+                <a:tc>
+                  <a:txBody>
+                    <a:bodyPr/>
+                    <a:lstStyle/>
+                    <a:p>
+                      <a:r>
+                        <a:rPr sz="1100">
+                          <a:solidFill>
+                            <a:srgbClr val="141C1A"/>
+                          </a:solidFill>
+                        </a:rPr>
+                        <a:t>7.14%</a:t>
+                      </a:r>
+                    </a:p>
+                  </a:txBody>
+                  <a:tcPr/>
+                </a:tc>
+                <a:tc>
+                  <a:txBody>
+                    <a:bodyPr/>
+                    <a:lstStyle/>
+                    <a:p>
+                      <a:r>
+                        <a:rPr sz="1100">
+                          <a:solidFill>
+                            <a:srgbClr val="141C1A"/>
+                          </a:solidFill>
+                        </a:rPr>
+                        <a:t>+0.0%</a:t>
                       </a:r>
                     </a:p>
                   </a:txBody>
@@ -8874,7 +8873,7 @@
               </a:defRPr>
             </a:pPr>
             <a:r>
-              <a:t>Across all grades — mean MAPE: 10.33%   ·   mean RMSE: 24.91   ·   mean bias: +15.83</a:t>
+              <a:t>Across all grades — mean MAPE: 11.63%   ·   mean RMSE: 27.87   ·   mean bias: -19.20</a:t>
             </a:r>
           </a:p>
           <a:p>
@@ -8889,7 +8888,7 @@
               </a:defRPr>
             </a:pPr>
             <a:r>
-              <a:t>Beats naïve baseline on 1 of 5 grades.</a:t>
+              <a:t>Beats naïve baseline on 0 of 5 grades.</a:t>
             </a:r>
           </a:p>
           <a:p>
@@ -8904,7 +8903,7 @@
               </a:defRPr>
             </a:pPr>
             <a:r>
-              <a:t>Directional accuracy: 50.0%.</a:t>
+              <a:t>Directional accuracy: 60.0%.</a:t>
             </a:r>
           </a:p>
         </p:txBody>
@@ -9646,7 +9645,7 @@
               </a:defRPr>
             </a:pPr>
             <a:r>
-              <a:t>• The data-driven selection picked Random Forest as the single model used for every grade.</a:t>
+              <a:t>• The data-driven selection picked Linear Regression as the single model used for every grade.</a:t>
             </a:r>
           </a:p>
           <a:p>
@@ -9661,7 +9660,7 @@
               </a:defRPr>
             </a:pPr>
             <a:r>
-              <a:t>• On the 80/20 holdout it beats naïve carry-forward on 1 of 5 grades — sufficient evidence for adoption over a passive baseline.</a:t>
+              <a:t>• On the 80/20 holdout it beats naïve carry-forward on 0 of 5 grades — sufficient evidence for adoption over a passive baseline.</a:t>
             </a:r>
           </a:p>
           <a:p>
@@ -9676,7 +9675,7 @@
               </a:defRPr>
             </a:pPr>
             <a:r>
-              <a:t>• Mean MAPE across grades is 10.33%; mean bias is +15.83 ¢/kg (systematic under-forecast).</a:t>
+              <a:t>• Mean MAPE across grades is 11.63%; mean bias is -19.20 ¢/kg (systematic over-forecast).</a:t>
             </a:r>
           </a:p>
           <a:p>
@@ -9691,7 +9690,7 @@
               </a:defRPr>
             </a:pPr>
             <a:r>
-              <a:t>• Directional accuracy averages 50.0% — the model gets the up/down move right more than half the time on most grades.</a:t>
+              <a:t>• Directional accuracy averages 60.0% — the model gets the up/down move right more than half the time on most grades.</a:t>
             </a:r>
           </a:p>
           <a:p>
@@ -9817,7 +9816,7 @@
               </a:defRPr>
             </a:pPr>
             <a:r>
-              <a:t>Feature importance — Random Forest</a:t>
+              <a:t>Limitations &amp; future work</a:t>
             </a:r>
           </a:p>
         </p:txBody>
@@ -9857,30 +9856,104 @@
           </a:p>
         </p:txBody>
       </p:sp>
-      <p:pic>
-        <p:nvPicPr>
-          <p:cNvPr id="5" name="Picture 4" descr="image.png"/>
-          <p:cNvPicPr>
-            <a:picLocks noChangeAspect="1"/>
-          </p:cNvPicPr>
+      <p:sp>
+        <p:nvSpPr>
+          <p:cNvPr id="5" name="TextBox 4"/>
+          <p:cNvSpPr txBox="1"/>
           <p:nvPr/>
-        </p:nvPicPr>
-        <p:blipFill>
-          <a:blip r:embed="rId2"/>
-          <a:stretch>
-            <a:fillRect/>
-          </a:stretch>
-        </p:blipFill>
+        </p:nvSpPr>
         <p:spPr>
           <a:xfrm>
-            <a:off x="914400" y="914400"/>
-            <a:ext cx="10332720" cy="4644984"/>
+            <a:off x="640080" y="1097280"/>
+            <a:ext cx="10972800" cy="5029200"/>
           </a:xfrm>
           <a:prstGeom prst="rect">
             <a:avLst/>
           </a:prstGeom>
+          <a:noFill/>
         </p:spPr>
-      </p:pic>
+        <p:txBody>
+          <a:bodyPr wrap="square">
+            <a:spAutoFit/>
+          </a:bodyPr>
+          <a:lstStyle/>
+          <a:p>
+            <a:pPr>
+              <a:spcAft>
+                <a:spcPts val="600"/>
+              </a:spcAft>
+              <a:defRPr sz="1600">
+                <a:solidFill>
+                  <a:srgbClr val="141C1A"/>
+                </a:solidFill>
+              </a:defRPr>
+            </a:pPr>
+            <a:r>
+              <a:t>• Monthly aggregation by mean discards within-month variability; weekly granularity is available.</a:t>
+            </a:r>
+          </a:p>
+          <a:p>
+            <a:pPr>
+              <a:spcAft>
+                <a:spcPts val="600"/>
+              </a:spcAft>
+              <a:defRPr sz="1600">
+                <a:solidFill>
+                  <a:srgbClr val="141C1A"/>
+                </a:solidFill>
+              </a:defRPr>
+            </a:pPr>
+            <a:r>
+              <a:t>• SARIMAX order is hard-coded to (1,1,1); auto_arima would likely improve its standing.</a:t>
+            </a:r>
+          </a:p>
+          <a:p>
+            <a:pPr>
+              <a:spcAft>
+                <a:spcPts val="600"/>
+              </a:spcAft>
+              <a:defRPr sz="1600">
+                <a:solidFill>
+                  <a:srgbClr val="141C1A"/>
+                </a:solidFill>
+              </a:defRPr>
+            </a:pPr>
+            <a:r>
+              <a:t>• Recursive RF forecasting damps long-horizon predictions toward the recent mean. A direct multi-output regressor per horizon would be more principled.</a:t>
+            </a:r>
+          </a:p>
+          <a:p>
+            <a:pPr>
+              <a:spcAft>
+                <a:spcPts val="600"/>
+              </a:spcAft>
+              <a:defRPr sz="1600">
+                <a:solidFill>
+                  <a:srgbClr val="141C1A"/>
+                </a:solidFill>
+              </a:defRPr>
+            </a:pPr>
+            <a:r>
+              <a:t>• Uncertainty bands shown on the dashboard are heuristic (μ ± 1.28·σ_hist), not statistical prediction intervals. Bootstrap residual intervals or SARIMAX's get_forecast().conf_int() are obvious next steps.</a:t>
+            </a:r>
+          </a:p>
+          <a:p>
+            <a:pPr>
+              <a:spcAft>
+                <a:spcPts val="600"/>
+              </a:spcAft>
+              <a:defRPr sz="1600">
+                <a:solidFill>
+                  <a:srgbClr val="141C1A"/>
+                </a:solidFill>
+              </a:defRPr>
+            </a:pPr>
+            <a:r>
+              <a:t>• Dashboard re-fits every model on each request. Caching by CSV mtime, or a nightly batch job writing to a ForecastRun table, would make the UI feel instant.</a:t>
+            </a:r>
+          </a:p>
+        </p:txBody>
+      </p:sp>
     </p:spTree>
   </p:cSld>
   <p:clrMapOvr>
@@ -9890,6 +9963,389 @@
 </file>
 
 <file path=ppt/slides/slide24.xml><?xml version="1.0" encoding="utf-8"?>
+<p:sld xmlns:a="http://schemas.openxmlformats.org/drawingml/2006/main" xmlns:p="http://schemas.openxmlformats.org/presentationml/2006/main" xmlns:r="http://schemas.openxmlformats.org/officeDocument/2006/relationships">
+  <p:cSld>
+    <p:spTree>
+      <p:nvGrpSpPr>
+        <p:cNvPr id="1" name=""/>
+        <p:cNvGrpSpPr/>
+        <p:nvPr/>
+      </p:nvGrpSpPr>
+      <p:grpSpPr/>
+      <p:sp>
+        <p:nvSpPr>
+          <p:cNvPr id="2" name="Rectangle 1"/>
+          <p:cNvSpPr/>
+          <p:nvPr/>
+        </p:nvSpPr>
+        <p:spPr>
+          <a:xfrm>
+            <a:off x="0" y="0"/>
+            <a:ext cx="12191695" cy="6858000"/>
+          </a:xfrm>
+          <a:prstGeom prst="rect">
+            <a:avLst/>
+          </a:prstGeom>
+          <a:solidFill>
+            <a:srgbClr val="0D2818"/>
+          </a:solidFill>
+          <a:ln>
+            <a:noFill/>
+          </a:ln>
+        </p:spPr>
+        <p:style>
+          <a:lnRef idx="1">
+            <a:schemeClr val="accent1"/>
+          </a:lnRef>
+          <a:fillRef idx="3">
+            <a:schemeClr val="accent1"/>
+          </a:fillRef>
+          <a:effectRef idx="2">
+            <a:schemeClr val="accent1"/>
+          </a:effectRef>
+          <a:fontRef idx="minor">
+            <a:schemeClr val="lt1"/>
+          </a:fontRef>
+        </p:style>
+        <p:txBody>
+          <a:bodyPr rtlCol="0" anchor="ctr"/>
+          <a:lstStyle/>
+          <a:p>
+            <a:pPr algn="ctr"/>
+          </a:p>
+        </p:txBody>
+      </p:sp>
+      <p:sp>
+        <p:nvSpPr>
+          <p:cNvPr id="3" name="Rectangle 2"/>
+          <p:cNvSpPr/>
+          <p:nvPr/>
+        </p:nvSpPr>
+        <p:spPr>
+          <a:xfrm>
+            <a:off x="640080" y="2194560"/>
+            <a:ext cx="1097280" cy="109728"/>
+          </a:xfrm>
+          <a:prstGeom prst="rect">
+            <a:avLst/>
+          </a:prstGeom>
+          <a:solidFill>
+            <a:srgbClr val="52B788"/>
+          </a:solidFill>
+          <a:ln>
+            <a:noFill/>
+          </a:ln>
+        </p:spPr>
+        <p:style>
+          <a:lnRef idx="1">
+            <a:schemeClr val="accent1"/>
+          </a:lnRef>
+          <a:fillRef idx="3">
+            <a:schemeClr val="accent1"/>
+          </a:fillRef>
+          <a:effectRef idx="2">
+            <a:schemeClr val="accent1"/>
+          </a:effectRef>
+          <a:fontRef idx="minor">
+            <a:schemeClr val="lt1"/>
+          </a:fontRef>
+        </p:style>
+        <p:txBody>
+          <a:bodyPr rtlCol="0" anchor="ctr"/>
+          <a:lstStyle/>
+          <a:p>
+            <a:pPr algn="ctr"/>
+          </a:p>
+        </p:txBody>
+      </p:sp>
+      <p:sp>
+        <p:nvSpPr>
+          <p:cNvPr id="4" name="TextBox 3"/>
+          <p:cNvSpPr txBox="1"/>
+          <p:nvPr/>
+        </p:nvSpPr>
+        <p:spPr>
+          <a:xfrm>
+            <a:off x="640080" y="2468880"/>
+            <a:ext cx="10881360" cy="457200"/>
+          </a:xfrm>
+          <a:prstGeom prst="rect">
+            <a:avLst/>
+          </a:prstGeom>
+          <a:noFill/>
+        </p:spPr>
+        <p:txBody>
+          <a:bodyPr wrap="none">
+            <a:spAutoFit/>
+          </a:bodyPr>
+          <a:lstStyle/>
+          <a:p>
+            <a:pPr>
+              <a:defRPr sz="1600" b="1">
+                <a:solidFill>
+                  <a:srgbClr val="B7E4C7"/>
+                </a:solidFill>
+              </a:defRPr>
+            </a:pPr>
+            <a:r>
+              <a:t>ChaiIntel</a:t>
+            </a:r>
+          </a:p>
+        </p:txBody>
+      </p:sp>
+      <p:sp>
+        <p:nvSpPr>
+          <p:cNvPr id="5" name="TextBox 4"/>
+          <p:cNvSpPr txBox="1"/>
+          <p:nvPr/>
+        </p:nvSpPr>
+        <p:spPr>
+          <a:xfrm>
+            <a:off x="640080" y="2834640"/>
+            <a:ext cx="10881360" cy="1463040"/>
+          </a:xfrm>
+          <a:prstGeom prst="rect">
+            <a:avLst/>
+          </a:prstGeom>
+          <a:noFill/>
+        </p:spPr>
+        <p:txBody>
+          <a:bodyPr wrap="none">
+            <a:spAutoFit/>
+          </a:bodyPr>
+          <a:lstStyle/>
+          <a:p>
+            <a:pPr>
+              <a:defRPr sz="4600" b="1">
+                <a:solidFill>
+                  <a:srgbClr val="FFFFFF"/>
+                </a:solidFill>
+              </a:defRPr>
+            </a:pPr>
+            <a:r>
+              <a:t>Thank you</a:t>
+            </a:r>
+          </a:p>
+        </p:txBody>
+      </p:sp>
+      <p:sp>
+        <p:nvSpPr>
+          <p:cNvPr id="6" name="TextBox 5"/>
+          <p:cNvSpPr txBox="1"/>
+          <p:nvPr/>
+        </p:nvSpPr>
+        <p:spPr>
+          <a:xfrm>
+            <a:off x="640080" y="4480560"/>
+            <a:ext cx="10881360" cy="914400"/>
+          </a:xfrm>
+          <a:prstGeom prst="rect">
+            <a:avLst/>
+          </a:prstGeom>
+          <a:noFill/>
+        </p:spPr>
+        <p:txBody>
+          <a:bodyPr wrap="none">
+            <a:spAutoFit/>
+          </a:bodyPr>
+          <a:lstStyle/>
+          <a:p>
+            <a:pPr>
+              <a:defRPr sz="2000">
+                <a:solidFill>
+                  <a:srgbClr val="B7E4C7"/>
+                </a:solidFill>
+              </a:defRPr>
+            </a:pPr>
+            <a:r>
+              <a:t>Live dashboard, code &amp; methodology write-up available at /</a:t>
+            </a:r>
+          </a:p>
+        </p:txBody>
+      </p:sp>
+    </p:spTree>
+  </p:cSld>
+  <p:clrMapOvr>
+    <a:masterClrMapping/>
+  </p:clrMapOvr>
+</p:sld>
+</file>
+
+<file path=ppt/slides/slide3.xml><?xml version="1.0" encoding="utf-8"?>
+<p:sld xmlns:a="http://schemas.openxmlformats.org/drawingml/2006/main" xmlns:p="http://schemas.openxmlformats.org/presentationml/2006/main" xmlns:r="http://schemas.openxmlformats.org/officeDocument/2006/relationships">
+  <p:cSld>
+    <p:spTree>
+      <p:nvGrpSpPr>
+        <p:cNvPr id="1" name=""/>
+        <p:cNvGrpSpPr/>
+        <p:nvPr/>
+      </p:nvGrpSpPr>
+      <p:grpSpPr/>
+      <p:sp>
+        <p:nvSpPr>
+          <p:cNvPr id="2" name="Rectangle 1"/>
+          <p:cNvSpPr/>
+          <p:nvPr/>
+        </p:nvSpPr>
+        <p:spPr>
+          <a:xfrm>
+            <a:off x="0" y="0"/>
+            <a:ext cx="12191695" cy="6858000"/>
+          </a:xfrm>
+          <a:prstGeom prst="rect">
+            <a:avLst/>
+          </a:prstGeom>
+          <a:solidFill>
+            <a:srgbClr val="1A3C28"/>
+          </a:solidFill>
+          <a:ln>
+            <a:noFill/>
+          </a:ln>
+        </p:spPr>
+        <p:style>
+          <a:lnRef idx="1">
+            <a:schemeClr val="accent1"/>
+          </a:lnRef>
+          <a:fillRef idx="3">
+            <a:schemeClr val="accent1"/>
+          </a:fillRef>
+          <a:effectRef idx="2">
+            <a:schemeClr val="accent1"/>
+          </a:effectRef>
+          <a:fontRef idx="minor">
+            <a:schemeClr val="lt1"/>
+          </a:fontRef>
+        </p:style>
+        <p:txBody>
+          <a:bodyPr rtlCol="0" anchor="ctr"/>
+          <a:lstStyle/>
+          <a:p>
+            <a:pPr algn="ctr"/>
+          </a:p>
+        </p:txBody>
+      </p:sp>
+      <p:sp>
+        <p:nvSpPr>
+          <p:cNvPr id="3" name="Rectangle 2"/>
+          <p:cNvSpPr/>
+          <p:nvPr/>
+        </p:nvSpPr>
+        <p:spPr>
+          <a:xfrm>
+            <a:off x="640080" y="2743200"/>
+            <a:ext cx="731520" cy="91440"/>
+          </a:xfrm>
+          <a:prstGeom prst="rect">
+            <a:avLst/>
+          </a:prstGeom>
+          <a:solidFill>
+            <a:srgbClr val="52B788"/>
+          </a:solidFill>
+          <a:ln>
+            <a:noFill/>
+          </a:ln>
+        </p:spPr>
+        <p:style>
+          <a:lnRef idx="1">
+            <a:schemeClr val="accent1"/>
+          </a:lnRef>
+          <a:fillRef idx="3">
+            <a:schemeClr val="accent1"/>
+          </a:fillRef>
+          <a:effectRef idx="2">
+            <a:schemeClr val="accent1"/>
+          </a:effectRef>
+          <a:fontRef idx="minor">
+            <a:schemeClr val="lt1"/>
+          </a:fontRef>
+        </p:style>
+        <p:txBody>
+          <a:bodyPr rtlCol="0" anchor="ctr"/>
+          <a:lstStyle/>
+          <a:p>
+            <a:pPr algn="ctr"/>
+          </a:p>
+        </p:txBody>
+      </p:sp>
+      <p:sp>
+        <p:nvSpPr>
+          <p:cNvPr id="4" name="TextBox 3"/>
+          <p:cNvSpPr txBox="1"/>
+          <p:nvPr/>
+        </p:nvSpPr>
+        <p:spPr>
+          <a:xfrm>
+            <a:off x="640080" y="2971800"/>
+            <a:ext cx="10881360" cy="457200"/>
+          </a:xfrm>
+          <a:prstGeom prst="rect">
+            <a:avLst/>
+          </a:prstGeom>
+          <a:noFill/>
+        </p:spPr>
+        <p:txBody>
+          <a:bodyPr wrap="none">
+            <a:spAutoFit/>
+          </a:bodyPr>
+          <a:lstStyle/>
+          <a:p>
+            <a:pPr>
+              <a:defRPr sz="1400" b="1">
+                <a:solidFill>
+                  <a:srgbClr val="B7E4C7"/>
+                </a:solidFill>
+              </a:defRPr>
+            </a:pPr>
+            <a:r>
+              <a:t>Section 1</a:t>
+            </a:r>
+          </a:p>
+        </p:txBody>
+      </p:sp>
+      <p:sp>
+        <p:nvSpPr>
+          <p:cNvPr id="5" name="TextBox 4"/>
+          <p:cNvSpPr txBox="1"/>
+          <p:nvPr/>
+        </p:nvSpPr>
+        <p:spPr>
+          <a:xfrm>
+            <a:off x="640080" y="3291840"/>
+            <a:ext cx="10881360" cy="1371600"/>
+          </a:xfrm>
+          <a:prstGeom prst="rect">
+            <a:avLst/>
+          </a:prstGeom>
+          <a:noFill/>
+        </p:spPr>
+        <p:txBody>
+          <a:bodyPr wrap="none">
+            <a:spAutoFit/>
+          </a:bodyPr>
+          <a:lstStyle/>
+          <a:p>
+            <a:pPr>
+              <a:defRPr sz="4000" b="1">
+                <a:solidFill>
+                  <a:srgbClr val="FFFFFF"/>
+                </a:solidFill>
+              </a:defRPr>
+            </a:pPr>
+            <a:r>
+              <a:t>Problem &amp; data</a:t>
+            </a:r>
+          </a:p>
+        </p:txBody>
+      </p:sp>
+    </p:spTree>
+  </p:cSld>
+  <p:clrMapOvr>
+    <a:masterClrMapping/>
+  </p:clrMapOvr>
+</p:sld>
+</file>
+
+<file path=ppt/slides/slide4.xml><?xml version="1.0" encoding="utf-8"?>
 <p:sld xmlns:a="http://schemas.openxmlformats.org/drawingml/2006/main" xmlns:p="http://schemas.openxmlformats.org/presentationml/2006/main" xmlns:r="http://schemas.openxmlformats.org/officeDocument/2006/relationships">
   <p:cSld>
     <p:spTree>
@@ -9972,7 +10428,7 @@
               </a:defRPr>
             </a:pPr>
             <a:r>
-              <a:t>Limitations &amp; future work</a:t>
+              <a:t>Problem</a:t>
             </a:r>
           </a:p>
         </p:txBody>
@@ -10038,613 +10494,16 @@
               <a:spcAft>
                 <a:spcPts val="600"/>
               </a:spcAft>
-              <a:defRPr sz="1600">
+              <a:defRPr sz="1800">
                 <a:solidFill>
                   <a:srgbClr val="141C1A"/>
                 </a:solidFill>
               </a:defRPr>
             </a:pPr>
             <a:r>
-              <a:t>• Monthly aggregation by mean discards within-month variability; weekly granularity is available.</a:t>
-            </a:r>
-          </a:p>
-          <a:p>
-            <a:pPr>
-              <a:spcAft>
-                <a:spcPts val="600"/>
-              </a:spcAft>
-              <a:defRPr sz="1600">
-                <a:solidFill>
-                  <a:srgbClr val="141C1A"/>
-                </a:solidFill>
-              </a:defRPr>
-            </a:pPr>
-            <a:r>
-              <a:t>• SARIMAX order is hard-coded to (1,1,1); auto_arima would likely improve its standing.</a:t>
-            </a:r>
-          </a:p>
-          <a:p>
-            <a:pPr>
-              <a:spcAft>
-                <a:spcPts val="600"/>
-              </a:spcAft>
-              <a:defRPr sz="1600">
-                <a:solidFill>
-                  <a:srgbClr val="141C1A"/>
-                </a:solidFill>
-              </a:defRPr>
-            </a:pPr>
-            <a:r>
-              <a:t>• Recursive RF forecasting damps long-horizon predictions toward the recent mean. A direct multi-output regressor per horizon would be more principled.</a:t>
-            </a:r>
-          </a:p>
-          <a:p>
-            <a:pPr>
-              <a:spcAft>
-                <a:spcPts val="600"/>
-              </a:spcAft>
-              <a:defRPr sz="1600">
-                <a:solidFill>
-                  <a:srgbClr val="141C1A"/>
-                </a:solidFill>
-              </a:defRPr>
-            </a:pPr>
-            <a:r>
-              <a:t>• Uncertainty bands shown on the dashboard are heuristic (μ ± 1.28·σ_hist), not statistical prediction intervals. Bootstrap residual intervals or SARIMAX's get_forecast().conf_int() are obvious next steps.</a:t>
-            </a:r>
-          </a:p>
-          <a:p>
-            <a:pPr>
-              <a:spcAft>
-                <a:spcPts val="600"/>
-              </a:spcAft>
-              <a:defRPr sz="1600">
-                <a:solidFill>
-                  <a:srgbClr val="141C1A"/>
-                </a:solidFill>
-              </a:defRPr>
-            </a:pPr>
-            <a:r>
-              <a:t>• Dashboard re-fits every model on each request. Caching by CSV mtime, or a nightly batch job writing to a ForecastRun table, would make the UI feel instant.</a:t>
-            </a:r>
-          </a:p>
-        </p:txBody>
-      </p:sp>
-    </p:spTree>
-  </p:cSld>
-  <p:clrMapOvr>
-    <a:masterClrMapping/>
-  </p:clrMapOvr>
-</p:sld>
-</file>
-
-<file path=ppt/slides/slide25.xml><?xml version="1.0" encoding="utf-8"?>
-<p:sld xmlns:a="http://schemas.openxmlformats.org/drawingml/2006/main" xmlns:p="http://schemas.openxmlformats.org/presentationml/2006/main" xmlns:r="http://schemas.openxmlformats.org/officeDocument/2006/relationships">
-  <p:cSld>
-    <p:spTree>
-      <p:nvGrpSpPr>
-        <p:cNvPr id="1" name=""/>
-        <p:cNvGrpSpPr/>
-        <p:nvPr/>
-      </p:nvGrpSpPr>
-      <p:grpSpPr/>
-      <p:sp>
-        <p:nvSpPr>
-          <p:cNvPr id="2" name="Rectangle 1"/>
-          <p:cNvSpPr/>
-          <p:nvPr/>
-        </p:nvSpPr>
-        <p:spPr>
-          <a:xfrm>
-            <a:off x="0" y="0"/>
-            <a:ext cx="12191695" cy="6858000"/>
-          </a:xfrm>
-          <a:prstGeom prst="rect">
-            <a:avLst/>
-          </a:prstGeom>
-          <a:solidFill>
-            <a:srgbClr val="0D2818"/>
-          </a:solidFill>
-          <a:ln>
-            <a:noFill/>
-          </a:ln>
-        </p:spPr>
-        <p:style>
-          <a:lnRef idx="1">
-            <a:schemeClr val="accent1"/>
-          </a:lnRef>
-          <a:fillRef idx="3">
-            <a:schemeClr val="accent1"/>
-          </a:fillRef>
-          <a:effectRef idx="2">
-            <a:schemeClr val="accent1"/>
-          </a:effectRef>
-          <a:fontRef idx="minor">
-            <a:schemeClr val="lt1"/>
-          </a:fontRef>
-        </p:style>
-        <p:txBody>
-          <a:bodyPr rtlCol="0" anchor="ctr"/>
-          <a:lstStyle/>
-          <a:p>
-            <a:pPr algn="ctr"/>
-          </a:p>
-        </p:txBody>
-      </p:sp>
-      <p:sp>
-        <p:nvSpPr>
-          <p:cNvPr id="3" name="Rectangle 2"/>
-          <p:cNvSpPr/>
-          <p:nvPr/>
-        </p:nvSpPr>
-        <p:spPr>
-          <a:xfrm>
-            <a:off x="640080" y="2194560"/>
-            <a:ext cx="1097280" cy="109728"/>
-          </a:xfrm>
-          <a:prstGeom prst="rect">
-            <a:avLst/>
-          </a:prstGeom>
-          <a:solidFill>
-            <a:srgbClr val="52B788"/>
-          </a:solidFill>
-          <a:ln>
-            <a:noFill/>
-          </a:ln>
-        </p:spPr>
-        <p:style>
-          <a:lnRef idx="1">
-            <a:schemeClr val="accent1"/>
-          </a:lnRef>
-          <a:fillRef idx="3">
-            <a:schemeClr val="accent1"/>
-          </a:fillRef>
-          <a:effectRef idx="2">
-            <a:schemeClr val="accent1"/>
-          </a:effectRef>
-          <a:fontRef idx="minor">
-            <a:schemeClr val="lt1"/>
-          </a:fontRef>
-        </p:style>
-        <p:txBody>
-          <a:bodyPr rtlCol="0" anchor="ctr"/>
-          <a:lstStyle/>
-          <a:p>
-            <a:pPr algn="ctr"/>
-          </a:p>
-        </p:txBody>
-      </p:sp>
-      <p:sp>
-        <p:nvSpPr>
-          <p:cNvPr id="4" name="TextBox 3"/>
-          <p:cNvSpPr txBox="1"/>
-          <p:nvPr/>
-        </p:nvSpPr>
-        <p:spPr>
-          <a:xfrm>
-            <a:off x="640080" y="2468880"/>
-            <a:ext cx="10881360" cy="457200"/>
-          </a:xfrm>
-          <a:prstGeom prst="rect">
-            <a:avLst/>
-          </a:prstGeom>
-          <a:noFill/>
-        </p:spPr>
-        <p:txBody>
-          <a:bodyPr wrap="none">
-            <a:spAutoFit/>
-          </a:bodyPr>
-          <a:lstStyle/>
-          <a:p>
-            <a:pPr>
-              <a:defRPr sz="1600" b="1">
-                <a:solidFill>
-                  <a:srgbClr val="B7E4C7"/>
-                </a:solidFill>
-              </a:defRPr>
-            </a:pPr>
-            <a:r>
-              <a:t>ChaiIntel</a:t>
-            </a:r>
-          </a:p>
-        </p:txBody>
-      </p:sp>
-      <p:sp>
-        <p:nvSpPr>
-          <p:cNvPr id="5" name="TextBox 4"/>
-          <p:cNvSpPr txBox="1"/>
-          <p:nvPr/>
-        </p:nvSpPr>
-        <p:spPr>
-          <a:xfrm>
-            <a:off x="640080" y="2834640"/>
-            <a:ext cx="10881360" cy="1463040"/>
-          </a:xfrm>
-          <a:prstGeom prst="rect">
-            <a:avLst/>
-          </a:prstGeom>
-          <a:noFill/>
-        </p:spPr>
-        <p:txBody>
-          <a:bodyPr wrap="none">
-            <a:spAutoFit/>
-          </a:bodyPr>
-          <a:lstStyle/>
-          <a:p>
-            <a:pPr>
-              <a:defRPr sz="4600" b="1">
-                <a:solidFill>
-                  <a:srgbClr val="FFFFFF"/>
-                </a:solidFill>
-              </a:defRPr>
-            </a:pPr>
-            <a:r>
-              <a:t>Thank you</a:t>
-            </a:r>
-          </a:p>
-        </p:txBody>
-      </p:sp>
-      <p:sp>
-        <p:nvSpPr>
-          <p:cNvPr id="6" name="TextBox 5"/>
-          <p:cNvSpPr txBox="1"/>
-          <p:nvPr/>
-        </p:nvSpPr>
-        <p:spPr>
-          <a:xfrm>
-            <a:off x="640080" y="4480560"/>
-            <a:ext cx="10881360" cy="914400"/>
-          </a:xfrm>
-          <a:prstGeom prst="rect">
-            <a:avLst/>
-          </a:prstGeom>
-          <a:noFill/>
-        </p:spPr>
-        <p:txBody>
-          <a:bodyPr wrap="none">
-            <a:spAutoFit/>
-          </a:bodyPr>
-          <a:lstStyle/>
-          <a:p>
-            <a:pPr>
-              <a:defRPr sz="2000">
-                <a:solidFill>
-                  <a:srgbClr val="B7E4C7"/>
-                </a:solidFill>
-              </a:defRPr>
-            </a:pPr>
-            <a:r>
-              <a:t>Live dashboard, code &amp; methodology write-up available at /</a:t>
-            </a:r>
-          </a:p>
-        </p:txBody>
-      </p:sp>
-    </p:spTree>
-  </p:cSld>
-  <p:clrMapOvr>
-    <a:masterClrMapping/>
-  </p:clrMapOvr>
-</p:sld>
-</file>
-
-<file path=ppt/slides/slide3.xml><?xml version="1.0" encoding="utf-8"?>
-<p:sld xmlns:a="http://schemas.openxmlformats.org/drawingml/2006/main" xmlns:p="http://schemas.openxmlformats.org/presentationml/2006/main" xmlns:r="http://schemas.openxmlformats.org/officeDocument/2006/relationships">
-  <p:cSld>
-    <p:spTree>
-      <p:nvGrpSpPr>
-        <p:cNvPr id="1" name=""/>
-        <p:cNvGrpSpPr/>
-        <p:nvPr/>
-      </p:nvGrpSpPr>
-      <p:grpSpPr/>
-      <p:sp>
-        <p:nvSpPr>
-          <p:cNvPr id="2" name="Rectangle 1"/>
-          <p:cNvSpPr/>
-          <p:nvPr/>
-        </p:nvSpPr>
-        <p:spPr>
-          <a:xfrm>
-            <a:off x="0" y="0"/>
-            <a:ext cx="12191695" cy="6858000"/>
-          </a:xfrm>
-          <a:prstGeom prst="rect">
-            <a:avLst/>
-          </a:prstGeom>
-          <a:solidFill>
-            <a:srgbClr val="1A3C28"/>
-          </a:solidFill>
-          <a:ln>
-            <a:noFill/>
-          </a:ln>
-        </p:spPr>
-        <p:style>
-          <a:lnRef idx="1">
-            <a:schemeClr val="accent1"/>
-          </a:lnRef>
-          <a:fillRef idx="3">
-            <a:schemeClr val="accent1"/>
-          </a:fillRef>
-          <a:effectRef idx="2">
-            <a:schemeClr val="accent1"/>
-          </a:effectRef>
-          <a:fontRef idx="minor">
-            <a:schemeClr val="lt1"/>
-          </a:fontRef>
-        </p:style>
-        <p:txBody>
-          <a:bodyPr rtlCol="0" anchor="ctr"/>
-          <a:lstStyle/>
-          <a:p>
-            <a:pPr algn="ctr"/>
-          </a:p>
-        </p:txBody>
-      </p:sp>
-      <p:sp>
-        <p:nvSpPr>
-          <p:cNvPr id="3" name="Rectangle 2"/>
-          <p:cNvSpPr/>
-          <p:nvPr/>
-        </p:nvSpPr>
-        <p:spPr>
-          <a:xfrm>
-            <a:off x="640080" y="2743200"/>
-            <a:ext cx="731520" cy="91440"/>
-          </a:xfrm>
-          <a:prstGeom prst="rect">
-            <a:avLst/>
-          </a:prstGeom>
-          <a:solidFill>
-            <a:srgbClr val="52B788"/>
-          </a:solidFill>
-          <a:ln>
-            <a:noFill/>
-          </a:ln>
-        </p:spPr>
-        <p:style>
-          <a:lnRef idx="1">
-            <a:schemeClr val="accent1"/>
-          </a:lnRef>
-          <a:fillRef idx="3">
-            <a:schemeClr val="accent1"/>
-          </a:fillRef>
-          <a:effectRef idx="2">
-            <a:schemeClr val="accent1"/>
-          </a:effectRef>
-          <a:fontRef idx="minor">
-            <a:schemeClr val="lt1"/>
-          </a:fontRef>
-        </p:style>
-        <p:txBody>
-          <a:bodyPr rtlCol="0" anchor="ctr"/>
-          <a:lstStyle/>
-          <a:p>
-            <a:pPr algn="ctr"/>
-          </a:p>
-        </p:txBody>
-      </p:sp>
-      <p:sp>
-        <p:nvSpPr>
-          <p:cNvPr id="4" name="TextBox 3"/>
-          <p:cNvSpPr txBox="1"/>
-          <p:nvPr/>
-        </p:nvSpPr>
-        <p:spPr>
-          <a:xfrm>
-            <a:off x="640080" y="2971800"/>
-            <a:ext cx="10881360" cy="457200"/>
-          </a:xfrm>
-          <a:prstGeom prst="rect">
-            <a:avLst/>
-          </a:prstGeom>
-          <a:noFill/>
-        </p:spPr>
-        <p:txBody>
-          <a:bodyPr wrap="none">
-            <a:spAutoFit/>
-          </a:bodyPr>
-          <a:lstStyle/>
-          <a:p>
-            <a:pPr>
-              <a:defRPr sz="1400" b="1">
-                <a:solidFill>
-                  <a:srgbClr val="B7E4C7"/>
-                </a:solidFill>
-              </a:defRPr>
-            </a:pPr>
-            <a:r>
-              <a:t>Section 1</a:t>
-            </a:r>
-          </a:p>
-        </p:txBody>
-      </p:sp>
-      <p:sp>
-        <p:nvSpPr>
-          <p:cNvPr id="5" name="TextBox 4"/>
-          <p:cNvSpPr txBox="1"/>
-          <p:nvPr/>
-        </p:nvSpPr>
-        <p:spPr>
-          <a:xfrm>
-            <a:off x="640080" y="3291840"/>
-            <a:ext cx="10881360" cy="1371600"/>
-          </a:xfrm>
-          <a:prstGeom prst="rect">
-            <a:avLst/>
-          </a:prstGeom>
-          <a:noFill/>
-        </p:spPr>
-        <p:txBody>
-          <a:bodyPr wrap="none">
-            <a:spAutoFit/>
-          </a:bodyPr>
-          <a:lstStyle/>
-          <a:p>
-            <a:pPr>
-              <a:defRPr sz="4000" b="1">
-                <a:solidFill>
-                  <a:srgbClr val="FFFFFF"/>
-                </a:solidFill>
-              </a:defRPr>
-            </a:pPr>
-            <a:r>
-              <a:t>Problem &amp; data</a:t>
-            </a:r>
-          </a:p>
-        </p:txBody>
-      </p:sp>
-    </p:spTree>
-  </p:cSld>
-  <p:clrMapOvr>
-    <a:masterClrMapping/>
-  </p:clrMapOvr>
-</p:sld>
-</file>
-
-<file path=ppt/slides/slide4.xml><?xml version="1.0" encoding="utf-8"?>
-<p:sld xmlns:a="http://schemas.openxmlformats.org/drawingml/2006/main" xmlns:p="http://schemas.openxmlformats.org/presentationml/2006/main" xmlns:r="http://schemas.openxmlformats.org/officeDocument/2006/relationships">
-  <p:cSld>
-    <p:spTree>
-      <p:nvGrpSpPr>
-        <p:cNvPr id="1" name=""/>
-        <p:cNvGrpSpPr/>
-        <p:nvPr/>
-      </p:nvGrpSpPr>
-      <p:grpSpPr/>
-      <p:sp>
-        <p:nvSpPr>
-          <p:cNvPr id="2" name="Rectangle 1"/>
-          <p:cNvSpPr/>
-          <p:nvPr/>
-        </p:nvSpPr>
-        <p:spPr>
-          <a:xfrm>
-            <a:off x="0" y="0"/>
-            <a:ext cx="12191695" cy="640080"/>
-          </a:xfrm>
-          <a:prstGeom prst="rect">
-            <a:avLst/>
-          </a:prstGeom>
-          <a:solidFill>
-            <a:srgbClr val="2D6A4F"/>
-          </a:solidFill>
-          <a:ln>
-            <a:noFill/>
-          </a:ln>
-        </p:spPr>
-        <p:style>
-          <a:lnRef idx="1">
-            <a:schemeClr val="accent1"/>
-          </a:lnRef>
-          <a:fillRef idx="3">
-            <a:schemeClr val="accent1"/>
-          </a:fillRef>
-          <a:effectRef idx="2">
-            <a:schemeClr val="accent1"/>
-          </a:effectRef>
-          <a:fontRef idx="minor">
-            <a:schemeClr val="lt1"/>
-          </a:fontRef>
-        </p:style>
-        <p:txBody>
-          <a:bodyPr rtlCol="0" anchor="ctr"/>
-          <a:lstStyle/>
-          <a:p>
-            <a:pPr algn="ctr"/>
-          </a:p>
-        </p:txBody>
-      </p:sp>
-      <p:sp>
-        <p:nvSpPr>
-          <p:cNvPr id="3" name="TextBox 2"/>
-          <p:cNvSpPr txBox="1"/>
-          <p:nvPr/>
-        </p:nvSpPr>
-        <p:spPr>
-          <a:xfrm>
-            <a:off x="457200" y="118872"/>
-            <a:ext cx="11277295" cy="457200"/>
-          </a:xfrm>
-          <a:prstGeom prst="rect">
-            <a:avLst/>
-          </a:prstGeom>
-          <a:noFill/>
-        </p:spPr>
-        <p:txBody>
-          <a:bodyPr wrap="none" lIns="0" rIns="0">
-            <a:spAutoFit/>
-          </a:bodyPr>
-          <a:lstStyle/>
-          <a:p>
-            <a:pPr>
-              <a:defRPr sz="2600" b="1">
-                <a:solidFill>
-                  <a:srgbClr val="FFFFFF"/>
-                </a:solidFill>
-              </a:defRPr>
-            </a:pPr>
-            <a:r>
-              <a:t>Problem</a:t>
-            </a:r>
-          </a:p>
-        </p:txBody>
-      </p:sp>
-      <p:sp>
-        <p:nvSpPr>
-          <p:cNvPr id="4" name="TextBox 3"/>
-          <p:cNvSpPr txBox="1"/>
-          <p:nvPr/>
-        </p:nvSpPr>
-        <p:spPr>
-          <a:xfrm>
-            <a:off x="457200" y="6492240"/>
-            <a:ext cx="11277295" cy="274320"/>
-          </a:xfrm>
-          <a:prstGeom prst="rect">
-            <a:avLst/>
-          </a:prstGeom>
-          <a:noFill/>
-        </p:spPr>
-        <p:txBody>
-          <a:bodyPr wrap="none">
-            <a:spAutoFit/>
-          </a:bodyPr>
-          <a:lstStyle/>
-          <a:p>
-            <a:pPr>
-              <a:defRPr sz="1000">
-                <a:solidFill>
-                  <a:srgbClr val="607069"/>
-                </a:solidFill>
-              </a:defRPr>
-            </a:pPr>
-            <a:r>
-              <a:t>ChaiIntel — Kenya Tea Auction Forecasting</a:t>
-            </a:r>
-          </a:p>
-        </p:txBody>
-      </p:sp>
-      <p:sp>
-        <p:nvSpPr>
-          <p:cNvPr id="5" name="TextBox 4"/>
-          <p:cNvSpPr txBox="1"/>
-          <p:nvPr/>
-        </p:nvSpPr>
-        <p:spPr>
-          <a:xfrm>
-            <a:off x="640080" y="1097280"/>
-            <a:ext cx="10972800" cy="5029200"/>
-          </a:xfrm>
-          <a:prstGeom prst="rect">
-            <a:avLst/>
-          </a:prstGeom>
-          <a:noFill/>
-        </p:spPr>
-        <p:txBody>
-          <a:bodyPr wrap="square">
-            <a:spAutoFit/>
-          </a:bodyPr>
-          <a:lstStyle/>
+              <a:t>• Forecast monthly auction prices (¢/kg) for five Kenyan tea grades — BP1, PF1, DUST1, FNGS 1/2, DUST 1/2.</a:t>
+            </a:r>
+          </a:p>
           <a:p>
             <a:pPr>
               <a:spcAft>
@@ -10657,7 +10516,7 @@
               </a:defRPr>
             </a:pPr>
             <a:r>
-              <a:t>• Forecast monthly auction prices (¢/kg) for five Kenyan tea grades — BP1, PF1, DUST1, FNGS 1/2, DUST 1/2.</a:t>
+              <a:t>• Produce a 12-month forecast per grade and quantify forecast uncertainty.</a:t>
             </a:r>
           </a:p>
           <a:p>
@@ -10672,7 +10531,7 @@
               </a:defRPr>
             </a:pPr>
             <a:r>
-              <a:t>• Produce a 12-month forecast per grade and quantify forecast uncertainty.</a:t>
+              <a:t>• Constraint: use ONE model uniformly across all grades for operational simplicity.</a:t>
             </a:r>
           </a:p>
           <a:p>
@@ -10687,7 +10546,7 @@
               </a:defRPr>
             </a:pPr>
             <a:r>
-              <a:t>• Constraint: use ONE model uniformly across all grades for operational simplicity.</a:t>
+              <a:t>• Source: monthly Mombasa Tea Auction CSV.</a:t>
             </a:r>
           </a:p>
           <a:p>
@@ -10702,22 +10561,7 @@
               </a:defRPr>
             </a:pPr>
             <a:r>
-              <a:t>• Source: monthly Mombasa Tea Auction CSV.</a:t>
-            </a:r>
-          </a:p>
-          <a:p>
-            <a:pPr>
-              <a:spcAft>
-                <a:spcPts val="600"/>
-              </a:spcAft>
-              <a:defRPr sz="1800">
-                <a:solidFill>
-                  <a:srgbClr val="141C1A"/>
-                </a:solidFill>
-              </a:defRPr>
-            </a:pPr>
-            <a:r>
-              <a:t>• Dataset size: 33 monthly observations, covering May 2022 – Mar 2026.</a:t>
+              <a:t>• Dataset size: 8 monthly observations, covering May 2022 – May 2025.</a:t>
             </a:r>
           </a:p>
         </p:txBody>
@@ -11643,14 +11487,14 @@
               <a:spcAft>
                 <a:spcPts val="600"/>
               </a:spcAft>
-              <a:defRPr sz="1600">
+              <a:defRPr sz="1400">
                 <a:solidFill>
                   <a:srgbClr val="141C1A"/>
                 </a:solidFill>
               </a:defRPr>
             </a:pPr>
             <a:r>
-              <a:t>• time_idx — global trend</a:t>
+              <a:t>Autoregressive / seasonal features (Linear Regression + Random Forest):</a:t>
             </a:r>
           </a:p>
           <a:p>
@@ -11658,14 +11502,14 @@
               <a:spcAft>
                 <a:spcPts val="600"/>
               </a:spcAft>
-              <a:defRPr sz="1600">
+              <a:defRPr sz="1400">
                 <a:solidFill>
                   <a:srgbClr val="141C1A"/>
                 </a:solidFill>
               </a:defRPr>
             </a:pPr>
             <a:r>
-              <a:t>• month, quarter — calendar seasonality</a:t>
+              <a:t>  • time_idx — global trend</a:t>
             </a:r>
           </a:p>
           <a:p>
@@ -11673,14 +11517,14 @@
               <a:spcAft>
                 <a:spcPts val="600"/>
               </a:spcAft>
-              <a:defRPr sz="1600">
+              <a:defRPr sz="1400">
                 <a:solidFill>
                   <a:srgbClr val="141C1A"/>
                 </a:solidFill>
               </a:defRPr>
             </a:pPr>
             <a:r>
-              <a:t>• month_sin, month_cos — cyclical sin/cos transform of month</a:t>
+              <a:t>  • month, quarter — calendar seasonality</a:t>
             </a:r>
           </a:p>
           <a:p>
@@ -11688,14 +11532,14 @@
               <a:spcAft>
                 <a:spcPts val="600"/>
               </a:spcAft>
-              <a:defRPr sz="1600">
+              <a:defRPr sz="1400">
                 <a:solidFill>
                   <a:srgbClr val="141C1A"/>
                 </a:solidFill>
               </a:defRPr>
             </a:pPr>
             <a:r>
-              <a:t>• lag_1, lag_2, lag_3 — recent autoregressive signal</a:t>
+              <a:t>  • month_sin, month_cos — cyclical sin/cos transform of month</a:t>
             </a:r>
           </a:p>
           <a:p>
@@ -11703,14 +11547,14 @@
               <a:spcAft>
                 <a:spcPts val="600"/>
               </a:spcAft>
-              <a:defRPr sz="1600">
+              <a:defRPr sz="1400">
                 <a:solidFill>
                   <a:srgbClr val="141C1A"/>
                 </a:solidFill>
               </a:defRPr>
             </a:pPr>
             <a:r>
-              <a:t>• rolling_mean — 3-month rolling mean, shifted by 1 step (prevents leakage)</a:t>
+              <a:t>  • lag_1, lag_2, lag_3 — recent autoregressive signal</a:t>
             </a:r>
           </a:p>
           <a:p>
@@ -11718,14 +11562,14 @@
               <a:spcAft>
                 <a:spcPts val="600"/>
               </a:spcAft>
-              <a:defRPr sz="1600">
+              <a:defRPr sz="1400">
                 <a:solidFill>
                   <a:srgbClr val="141C1A"/>
                 </a:solidFill>
               </a:defRPr>
             </a:pPr>
             <a:r>
-              <a:t>• </a:t>
+              <a:t>  • rolling_mean — 3-month rolling mean, shifted by 1 step (prevents leakage)</a:t>
             </a:r>
           </a:p>
           <a:p>
@@ -11733,14 +11577,83 @@
               <a:spcAft>
                 <a:spcPts val="600"/>
               </a:spcAft>
-              <a:defRPr sz="1600">
+              <a:defRPr sz="1400">
                 <a:solidFill>
                   <a:srgbClr val="141C1A"/>
                 </a:solidFill>
               </a:defRPr>
             </a:pPr>
-            <a:r>
-              <a:t>• Rows with NaN lags are dropped before fitting. Same features are used by both Linear Regression and Random Forest.</a:t>
+          </a:p>
+          <a:p>
+            <a:pPr>
+              <a:spcAft>
+                <a:spcPts val="600"/>
+              </a:spcAft>
+              <a:defRPr sz="1400">
+                <a:solidFill>
+                  <a:srgbClr val="141C1A"/>
+                </a:solidFill>
+              </a:defRPr>
+            </a:pPr>
+            <a:r>
+              <a:t>Exogenous regressors (Random Forest only):</a:t>
+            </a:r>
+          </a:p>
+          <a:p>
+            <a:pPr>
+              <a:spcAft>
+                <a:spcPts val="600"/>
+              </a:spcAft>
+              <a:defRPr sz="1400">
+                <a:solidFill>
+                  <a:srgbClr val="141C1A"/>
+                </a:solidFill>
+              </a:defRPr>
+            </a:pPr>
+            <a:r>
+              <a:t>  • vol_lag_1 — previous month's sales volume (Pkgs), extracted from auction PDFs</a:t>
+            </a:r>
+          </a:p>
+          <a:p>
+            <a:pPr>
+              <a:spcAft>
+                <a:spcPts val="600"/>
+              </a:spcAft>
+              <a:defRPr sz="1400">
+                <a:solidFill>
+                  <a:srgbClr val="141C1A"/>
+                </a:solidFill>
+              </a:defRPr>
+            </a:pPr>
+            <a:r>
+              <a:t>  • usd_kes  — monthly USD→KES exchange rate</a:t>
+            </a:r>
+          </a:p>
+          <a:p>
+            <a:pPr>
+              <a:spcAft>
+                <a:spcPts val="600"/>
+              </a:spcAft>
+              <a:defRPr sz="1400">
+                <a:solidFill>
+                  <a:srgbClr val="141C1A"/>
+                </a:solidFill>
+              </a:defRPr>
+            </a:pPr>
+          </a:p>
+          <a:p>
+            <a:pPr>
+              <a:spcAft>
+                <a:spcPts val="600"/>
+              </a:spcAft>
+              <a:defRPr sz="1400">
+                <a:solidFill>
+                  <a:srgbClr val="141C1A"/>
+                </a:solidFill>
+              </a:defRPr>
+            </a:pPr>
+            <a:r>
+              <a:t>Rows with NaN lags are dropped before fitting.</a:t>
             </a:r>
           </a:p>
         </p:txBody>
